--- a/Presentations_and_Extracted_Media/KEFFI_MASTER_20_SLIDE_PRESENTATION.pptx
+++ b/Presentations_and_Extracted_Media/KEFFI_MASTER_20_SLIDE_PRESENTATION.pptx
@@ -3208,7 +3208,7 @@
           <a:lstStyle/>
           <a:p>
             <a:pPr>
-              <a:defRPr sz="2200" b="1">
+              <a:defRPr sz="2100" b="1">
                 <a:solidFill>
                   <a:srgbClr val="FFFFFF"/>
                 </a:solidFill>
@@ -3324,30 +3324,30 @@
           <a:p>
             <a:pPr>
               <a:spcBef>
-                <a:spcPts val="400"/>
+                <a:spcPts val="300"/>
               </a:spcBef>
               <a:spcAft>
-                <a:spcPts val="1400"/>
+                <a:spcPts val="1200"/>
               </a:spcAft>
-              <a:defRPr sz="1600">
+              <a:defRPr sz="1500">
                 <a:solidFill>
                   <a:srgbClr val="1B3B3B"/>
                 </a:solidFill>
               </a:defRPr>
             </a:pPr>
             <a:r>
-              <a:t>•  Institution: University College of Engineering Panruti (Constituent College of Anna University)</a:t>
+              <a:t>•  Institution: University College of Engineering Panruti (Constituent College of Anna University, Chennai)</a:t>
             </a:r>
           </a:p>
           <a:p>
             <a:pPr>
               <a:spcBef>
-                <a:spcPts val="400"/>
+                <a:spcPts val="300"/>
               </a:spcBef>
               <a:spcAft>
-                <a:spcPts val="1400"/>
+                <a:spcPts val="1200"/>
               </a:spcAft>
-              <a:defRPr sz="1600">
+              <a:defRPr sz="1500">
                 <a:solidFill>
                   <a:srgbClr val="1B3B3B"/>
                 </a:solidFill>
@@ -3360,30 +3360,30 @@
           <a:p>
             <a:pPr>
               <a:spcBef>
-                <a:spcPts val="400"/>
+                <a:spcPts val="300"/>
               </a:spcBef>
               <a:spcAft>
-                <a:spcPts val="1400"/>
+                <a:spcPts val="1200"/>
               </a:spcAft>
-              <a:defRPr sz="1600">
+              <a:defRPr sz="1500">
                 <a:solidFill>
                   <a:srgbClr val="1B3B3B"/>
                 </a:solidFill>
               </a:defRPr>
             </a:pPr>
             <a:r>
-              <a:t>•  Faculty Project Guide: DR. S. SIVANESH M.Tech., Ph.D. (Head of Department, CSE)</a:t>
+              <a:t>•  Faculty Project Guide: DR. S. SIVANESH M.Tech., Ph.D. (Assistant Professor &amp; Head of Department, CSE)</a:t>
             </a:r>
           </a:p>
           <a:p>
             <a:pPr>
               <a:spcBef>
-                <a:spcPts val="400"/>
+                <a:spcPts val="300"/>
               </a:spcBef>
               <a:spcAft>
-                <a:spcPts val="1400"/>
+                <a:spcPts val="1200"/>
               </a:spcAft>
-              <a:defRPr sz="1600">
+              <a:defRPr sz="1500">
                 <a:solidFill>
                   <a:srgbClr val="1B3B3B"/>
                 </a:solidFill>
@@ -3549,7 +3549,7 @@
           <a:lstStyle/>
           <a:p>
             <a:pPr>
-              <a:defRPr sz="2200" b="1">
+              <a:defRPr sz="2100" b="1">
                 <a:solidFill>
                   <a:srgbClr val="FFFFFF"/>
                 </a:solidFill>
@@ -3665,12 +3665,12 @@
           <a:p>
             <a:pPr>
               <a:spcBef>
-                <a:spcPts val="400"/>
+                <a:spcPts val="300"/>
               </a:spcBef>
               <a:spcAft>
-                <a:spcPts val="1400"/>
+                <a:spcPts val="1200"/>
               </a:spcAft>
-              <a:defRPr sz="1600">
+              <a:defRPr sz="1500">
                 <a:solidFill>
                   <a:srgbClr val="1B3B3B"/>
                 </a:solidFill>
@@ -3683,12 +3683,12 @@
           <a:p>
             <a:pPr>
               <a:spcBef>
-                <a:spcPts val="400"/>
+                <a:spcPts val="300"/>
               </a:spcBef>
               <a:spcAft>
-                <a:spcPts val="1400"/>
+                <a:spcPts val="1200"/>
               </a:spcAft>
-              <a:defRPr sz="1600">
+              <a:defRPr sz="1500">
                 <a:solidFill>
                   <a:srgbClr val="1B3B3B"/>
                 </a:solidFill>
@@ -3701,12 +3701,12 @@
           <a:p>
             <a:pPr>
               <a:spcBef>
-                <a:spcPts val="400"/>
+                <a:spcPts val="300"/>
               </a:spcBef>
               <a:spcAft>
-                <a:spcPts val="1400"/>
+                <a:spcPts val="1200"/>
               </a:spcAft>
-              <a:defRPr sz="1600">
+              <a:defRPr sz="1500">
                 <a:solidFill>
                   <a:srgbClr val="1B3B3B"/>
                 </a:solidFill>
@@ -3719,12 +3719,12 @@
           <a:p>
             <a:pPr>
               <a:spcBef>
-                <a:spcPts val="400"/>
+                <a:spcPts val="300"/>
               </a:spcBef>
               <a:spcAft>
-                <a:spcPts val="1400"/>
+                <a:spcPts val="1200"/>
               </a:spcAft>
-              <a:defRPr sz="1600">
+              <a:defRPr sz="1500">
                 <a:solidFill>
                   <a:srgbClr val="1B3B3B"/>
                 </a:solidFill>
@@ -3890,7 +3890,7 @@
           <a:lstStyle/>
           <a:p>
             <a:pPr>
-              <a:defRPr sz="2200" b="1">
+              <a:defRPr sz="2100" b="1">
                 <a:solidFill>
                   <a:srgbClr val="FFFFFF"/>
                 </a:solidFill>
@@ -4006,12 +4006,12 @@
           <a:p>
             <a:pPr>
               <a:spcBef>
-                <a:spcPts val="400"/>
+                <a:spcPts val="300"/>
               </a:spcBef>
               <a:spcAft>
-                <a:spcPts val="1400"/>
+                <a:spcPts val="1200"/>
               </a:spcAft>
-              <a:defRPr sz="1600">
+              <a:defRPr sz="1500">
                 <a:solidFill>
                   <a:srgbClr val="1B3B3B"/>
                 </a:solidFill>
@@ -4024,12 +4024,12 @@
           <a:p>
             <a:pPr>
               <a:spcBef>
-                <a:spcPts val="400"/>
+                <a:spcPts val="300"/>
               </a:spcBef>
               <a:spcAft>
-                <a:spcPts val="1400"/>
+                <a:spcPts val="1200"/>
               </a:spcAft>
-              <a:defRPr sz="1600">
+              <a:defRPr sz="1500">
                 <a:solidFill>
                   <a:srgbClr val="1B3B3B"/>
                 </a:solidFill>
@@ -4042,12 +4042,12 @@
           <a:p>
             <a:pPr>
               <a:spcBef>
-                <a:spcPts val="400"/>
+                <a:spcPts val="300"/>
               </a:spcBef>
               <a:spcAft>
-                <a:spcPts val="1400"/>
+                <a:spcPts val="1200"/>
               </a:spcAft>
-              <a:defRPr sz="1600">
+              <a:defRPr sz="1500">
                 <a:solidFill>
                   <a:srgbClr val="1B3B3B"/>
                 </a:solidFill>
@@ -4060,12 +4060,12 @@
           <a:p>
             <a:pPr>
               <a:spcBef>
-                <a:spcPts val="400"/>
+                <a:spcPts val="300"/>
               </a:spcBef>
               <a:spcAft>
-                <a:spcPts val="1400"/>
+                <a:spcPts val="1200"/>
               </a:spcAft>
-              <a:defRPr sz="1600">
+              <a:defRPr sz="1500">
                 <a:solidFill>
                   <a:srgbClr val="1B3B3B"/>
                 </a:solidFill>
@@ -4231,7 +4231,7 @@
           <a:lstStyle/>
           <a:p>
             <a:pPr>
-              <a:defRPr sz="2200" b="1">
+              <a:defRPr sz="2100" b="1">
                 <a:solidFill>
                   <a:srgbClr val="FFFFFF"/>
                 </a:solidFill>
@@ -4347,12 +4347,12 @@
           <a:p>
             <a:pPr>
               <a:spcBef>
-                <a:spcPts val="400"/>
+                <a:spcPts val="300"/>
               </a:spcBef>
               <a:spcAft>
-                <a:spcPts val="1400"/>
+                <a:spcPts val="1200"/>
               </a:spcAft>
-              <a:defRPr sz="1600">
+              <a:defRPr sz="1500">
                 <a:solidFill>
                   <a:srgbClr val="1B3B3B"/>
                 </a:solidFill>
@@ -4365,12 +4365,12 @@
           <a:p>
             <a:pPr>
               <a:spcBef>
-                <a:spcPts val="400"/>
+                <a:spcPts val="300"/>
               </a:spcBef>
               <a:spcAft>
-                <a:spcPts val="1400"/>
+                <a:spcPts val="1200"/>
               </a:spcAft>
-              <a:defRPr sz="1600">
+              <a:defRPr sz="1500">
                 <a:solidFill>
                   <a:srgbClr val="1B3B3B"/>
                 </a:solidFill>
@@ -4383,12 +4383,12 @@
           <a:p>
             <a:pPr>
               <a:spcBef>
-                <a:spcPts val="400"/>
+                <a:spcPts val="300"/>
               </a:spcBef>
               <a:spcAft>
-                <a:spcPts val="1400"/>
+                <a:spcPts val="1200"/>
               </a:spcAft>
-              <a:defRPr sz="1600">
+              <a:defRPr sz="1500">
                 <a:solidFill>
                   <a:srgbClr val="1B3B3B"/>
                 </a:solidFill>
@@ -4401,12 +4401,12 @@
           <a:p>
             <a:pPr>
               <a:spcBef>
-                <a:spcPts val="400"/>
+                <a:spcPts val="300"/>
               </a:spcBef>
               <a:spcAft>
-                <a:spcPts val="1400"/>
+                <a:spcPts val="1200"/>
               </a:spcAft>
-              <a:defRPr sz="1600">
+              <a:defRPr sz="1500">
                 <a:solidFill>
                   <a:srgbClr val="1B3B3B"/>
                 </a:solidFill>
@@ -4572,7 +4572,7 @@
           <a:lstStyle/>
           <a:p>
             <a:pPr>
-              <a:defRPr sz="2200" b="1">
+              <a:defRPr sz="2100" b="1">
                 <a:solidFill>
                   <a:srgbClr val="FFFFFF"/>
                 </a:solidFill>
@@ -4688,12 +4688,12 @@
           <a:p>
             <a:pPr>
               <a:spcBef>
-                <a:spcPts val="400"/>
+                <a:spcPts val="300"/>
               </a:spcBef>
               <a:spcAft>
-                <a:spcPts val="1400"/>
+                <a:spcPts val="1200"/>
               </a:spcAft>
-              <a:defRPr sz="1600">
+              <a:defRPr sz="1500">
                 <a:solidFill>
                   <a:srgbClr val="1B3B3B"/>
                 </a:solidFill>
@@ -4706,12 +4706,12 @@
           <a:p>
             <a:pPr>
               <a:spcBef>
-                <a:spcPts val="400"/>
+                <a:spcPts val="300"/>
               </a:spcBef>
               <a:spcAft>
-                <a:spcPts val="1400"/>
+                <a:spcPts val="1200"/>
               </a:spcAft>
-              <a:defRPr sz="1600">
+              <a:defRPr sz="1500">
                 <a:solidFill>
                   <a:srgbClr val="1B3B3B"/>
                 </a:solidFill>
@@ -4724,12 +4724,12 @@
           <a:p>
             <a:pPr>
               <a:spcBef>
-                <a:spcPts val="400"/>
+                <a:spcPts val="300"/>
               </a:spcBef>
               <a:spcAft>
-                <a:spcPts val="1400"/>
+                <a:spcPts val="1200"/>
               </a:spcAft>
-              <a:defRPr sz="1600">
+              <a:defRPr sz="1500">
                 <a:solidFill>
                   <a:srgbClr val="1B3B3B"/>
                 </a:solidFill>
@@ -4742,12 +4742,12 @@
           <a:p>
             <a:pPr>
               <a:spcBef>
-                <a:spcPts val="400"/>
+                <a:spcPts val="300"/>
               </a:spcBef>
               <a:spcAft>
-                <a:spcPts val="1400"/>
+                <a:spcPts val="1200"/>
               </a:spcAft>
-              <a:defRPr sz="1600">
+              <a:defRPr sz="1500">
                 <a:solidFill>
                   <a:srgbClr val="1B3B3B"/>
                 </a:solidFill>
@@ -4913,7 +4913,7 @@
           <a:lstStyle/>
           <a:p>
             <a:pPr>
-              <a:defRPr sz="2200" b="1">
+              <a:defRPr sz="2100" b="1">
                 <a:solidFill>
                   <a:srgbClr val="FFFFFF"/>
                 </a:solidFill>
@@ -5029,12 +5029,12 @@
           <a:p>
             <a:pPr>
               <a:spcBef>
-                <a:spcPts val="400"/>
+                <a:spcPts val="300"/>
               </a:spcBef>
               <a:spcAft>
-                <a:spcPts val="1400"/>
+                <a:spcPts val="1200"/>
               </a:spcAft>
-              <a:defRPr sz="1600">
+              <a:defRPr sz="1500">
                 <a:solidFill>
                   <a:srgbClr val="1B3B3B"/>
                 </a:solidFill>
@@ -5047,12 +5047,12 @@
           <a:p>
             <a:pPr>
               <a:spcBef>
-                <a:spcPts val="400"/>
+                <a:spcPts val="300"/>
               </a:spcBef>
               <a:spcAft>
-                <a:spcPts val="1400"/>
+                <a:spcPts val="1200"/>
               </a:spcAft>
-              <a:defRPr sz="1600">
+              <a:defRPr sz="1500">
                 <a:solidFill>
                   <a:srgbClr val="1B3B3B"/>
                 </a:solidFill>
@@ -5065,12 +5065,12 @@
           <a:p>
             <a:pPr>
               <a:spcBef>
-                <a:spcPts val="400"/>
+                <a:spcPts val="300"/>
               </a:spcBef>
               <a:spcAft>
-                <a:spcPts val="1400"/>
+                <a:spcPts val="1200"/>
               </a:spcAft>
-              <a:defRPr sz="1600">
+              <a:defRPr sz="1500">
                 <a:solidFill>
                   <a:srgbClr val="1B3B3B"/>
                 </a:solidFill>
@@ -5083,12 +5083,12 @@
           <a:p>
             <a:pPr>
               <a:spcBef>
-                <a:spcPts val="400"/>
+                <a:spcPts val="300"/>
               </a:spcBef>
               <a:spcAft>
-                <a:spcPts val="1400"/>
+                <a:spcPts val="1200"/>
               </a:spcAft>
-              <a:defRPr sz="1600">
+              <a:defRPr sz="1500">
                 <a:solidFill>
                   <a:srgbClr val="1B3B3B"/>
                 </a:solidFill>
@@ -5254,7 +5254,7 @@
           <a:lstStyle/>
           <a:p>
             <a:pPr>
-              <a:defRPr sz="2200" b="1">
+              <a:defRPr sz="2100" b="1">
                 <a:solidFill>
                   <a:srgbClr val="FFFFFF"/>
                 </a:solidFill>
@@ -5370,12 +5370,12 @@
           <a:p>
             <a:pPr>
               <a:spcBef>
-                <a:spcPts val="400"/>
+                <a:spcPts val="300"/>
               </a:spcBef>
               <a:spcAft>
-                <a:spcPts val="1400"/>
+                <a:spcPts val="1200"/>
               </a:spcAft>
-              <a:defRPr sz="1600">
+              <a:defRPr sz="1500">
                 <a:solidFill>
                   <a:srgbClr val="1B3B3B"/>
                 </a:solidFill>
@@ -5388,12 +5388,12 @@
           <a:p>
             <a:pPr>
               <a:spcBef>
-                <a:spcPts val="400"/>
+                <a:spcPts val="300"/>
               </a:spcBef>
               <a:spcAft>
-                <a:spcPts val="1400"/>
+                <a:spcPts val="1200"/>
               </a:spcAft>
-              <a:defRPr sz="1600">
+              <a:defRPr sz="1500">
                 <a:solidFill>
                   <a:srgbClr val="1B3B3B"/>
                 </a:solidFill>
@@ -5406,12 +5406,12 @@
           <a:p>
             <a:pPr>
               <a:spcBef>
-                <a:spcPts val="400"/>
+                <a:spcPts val="300"/>
               </a:spcBef>
               <a:spcAft>
-                <a:spcPts val="1400"/>
+                <a:spcPts val="1200"/>
               </a:spcAft>
-              <a:defRPr sz="1600">
+              <a:defRPr sz="1500">
                 <a:solidFill>
                   <a:srgbClr val="1B3B3B"/>
                 </a:solidFill>
@@ -5424,12 +5424,12 @@
           <a:p>
             <a:pPr>
               <a:spcBef>
-                <a:spcPts val="400"/>
+                <a:spcPts val="300"/>
               </a:spcBef>
               <a:spcAft>
-                <a:spcPts val="1400"/>
+                <a:spcPts val="1200"/>
               </a:spcAft>
-              <a:defRPr sz="1600">
+              <a:defRPr sz="1500">
                 <a:solidFill>
                   <a:srgbClr val="1B3B3B"/>
                 </a:solidFill>
@@ -5595,7 +5595,7 @@
           <a:lstStyle/>
           <a:p>
             <a:pPr>
-              <a:defRPr sz="2200" b="1">
+              <a:defRPr sz="2100" b="1">
                 <a:solidFill>
                   <a:srgbClr val="FFFFFF"/>
                 </a:solidFill>
@@ -5711,12 +5711,12 @@
           <a:p>
             <a:pPr>
               <a:spcBef>
-                <a:spcPts val="400"/>
+                <a:spcPts val="300"/>
               </a:spcBef>
               <a:spcAft>
-                <a:spcPts val="1400"/>
+                <a:spcPts val="1200"/>
               </a:spcAft>
-              <a:defRPr sz="1600">
+              <a:defRPr sz="1500">
                 <a:solidFill>
                   <a:srgbClr val="1B3B3B"/>
                 </a:solidFill>
@@ -5729,12 +5729,12 @@
           <a:p>
             <a:pPr>
               <a:spcBef>
-                <a:spcPts val="400"/>
+                <a:spcPts val="300"/>
               </a:spcBef>
               <a:spcAft>
-                <a:spcPts val="1400"/>
+                <a:spcPts val="1200"/>
               </a:spcAft>
-              <a:defRPr sz="1600">
+              <a:defRPr sz="1500">
                 <a:solidFill>
                   <a:srgbClr val="1B3B3B"/>
                 </a:solidFill>
@@ -5747,12 +5747,12 @@
           <a:p>
             <a:pPr>
               <a:spcBef>
-                <a:spcPts val="400"/>
+                <a:spcPts val="300"/>
               </a:spcBef>
               <a:spcAft>
-                <a:spcPts val="1400"/>
+                <a:spcPts val="1200"/>
               </a:spcAft>
-              <a:defRPr sz="1600">
+              <a:defRPr sz="1500">
                 <a:solidFill>
                   <a:srgbClr val="1B3B3B"/>
                 </a:solidFill>
@@ -5765,12 +5765,12 @@
           <a:p>
             <a:pPr>
               <a:spcBef>
-                <a:spcPts val="400"/>
+                <a:spcPts val="300"/>
               </a:spcBef>
               <a:spcAft>
-                <a:spcPts val="1400"/>
+                <a:spcPts val="1200"/>
               </a:spcAft>
-              <a:defRPr sz="1600">
+              <a:defRPr sz="1500">
                 <a:solidFill>
                   <a:srgbClr val="1B3B3B"/>
                 </a:solidFill>
@@ -5936,7 +5936,7 @@
           <a:lstStyle/>
           <a:p>
             <a:pPr>
-              <a:defRPr sz="2200" b="1">
+              <a:defRPr sz="2100" b="1">
                 <a:solidFill>
                   <a:srgbClr val="FFFFFF"/>
                 </a:solidFill>
@@ -6052,12 +6052,12 @@
           <a:p>
             <a:pPr>
               <a:spcBef>
-                <a:spcPts val="400"/>
+                <a:spcPts val="300"/>
               </a:spcBef>
               <a:spcAft>
-                <a:spcPts val="1400"/>
+                <a:spcPts val="1200"/>
               </a:spcAft>
-              <a:defRPr sz="1600">
+              <a:defRPr sz="1500">
                 <a:solidFill>
                   <a:srgbClr val="1B3B3B"/>
                 </a:solidFill>
@@ -6070,12 +6070,12 @@
           <a:p>
             <a:pPr>
               <a:spcBef>
-                <a:spcPts val="400"/>
+                <a:spcPts val="300"/>
               </a:spcBef>
               <a:spcAft>
-                <a:spcPts val="1400"/>
+                <a:spcPts val="1200"/>
               </a:spcAft>
-              <a:defRPr sz="1600">
+              <a:defRPr sz="1500">
                 <a:solidFill>
                   <a:srgbClr val="1B3B3B"/>
                 </a:solidFill>
@@ -6088,12 +6088,12 @@
           <a:p>
             <a:pPr>
               <a:spcBef>
-                <a:spcPts val="400"/>
+                <a:spcPts val="300"/>
               </a:spcBef>
               <a:spcAft>
-                <a:spcPts val="1400"/>
+                <a:spcPts val="1200"/>
               </a:spcAft>
-              <a:defRPr sz="1600">
+              <a:defRPr sz="1500">
                 <a:solidFill>
                   <a:srgbClr val="1B3B3B"/>
                 </a:solidFill>
@@ -6106,12 +6106,12 @@
           <a:p>
             <a:pPr>
               <a:spcBef>
-                <a:spcPts val="400"/>
+                <a:spcPts val="300"/>
               </a:spcBef>
               <a:spcAft>
-                <a:spcPts val="1400"/>
+                <a:spcPts val="1200"/>
               </a:spcAft>
-              <a:defRPr sz="1600">
+              <a:defRPr sz="1500">
                 <a:solidFill>
                   <a:srgbClr val="1B3B3B"/>
                 </a:solidFill>
@@ -6124,12 +6124,12 @@
           <a:p>
             <a:pPr>
               <a:spcBef>
-                <a:spcPts val="400"/>
+                <a:spcPts val="300"/>
               </a:spcBef>
               <a:spcAft>
-                <a:spcPts val="1400"/>
+                <a:spcPts val="1200"/>
               </a:spcAft>
-              <a:defRPr sz="1600">
+              <a:defRPr sz="1500">
                 <a:solidFill>
                   <a:srgbClr val="1B3B3B"/>
                 </a:solidFill>
@@ -6295,7 +6295,7 @@
           <a:lstStyle/>
           <a:p>
             <a:pPr>
-              <a:defRPr sz="2200" b="1">
+              <a:defRPr sz="2100" b="1">
                 <a:solidFill>
                   <a:srgbClr val="FFFFFF"/>
                 </a:solidFill>
@@ -6411,12 +6411,12 @@
           <a:p>
             <a:pPr>
               <a:spcBef>
-                <a:spcPts val="400"/>
+                <a:spcPts val="300"/>
               </a:spcBef>
               <a:spcAft>
-                <a:spcPts val="1400"/>
+                <a:spcPts val="1200"/>
               </a:spcAft>
-              <a:defRPr sz="1600">
+              <a:defRPr sz="1500">
                 <a:solidFill>
                   <a:srgbClr val="1B3B3B"/>
                 </a:solidFill>
@@ -6429,12 +6429,12 @@
           <a:p>
             <a:pPr>
               <a:spcBef>
-                <a:spcPts val="400"/>
+                <a:spcPts val="300"/>
               </a:spcBef>
               <a:spcAft>
-                <a:spcPts val="1400"/>
+                <a:spcPts val="1200"/>
               </a:spcAft>
-              <a:defRPr sz="1600">
+              <a:defRPr sz="1500">
                 <a:solidFill>
                   <a:srgbClr val="1B3B3B"/>
                 </a:solidFill>
@@ -6447,12 +6447,12 @@
           <a:p>
             <a:pPr>
               <a:spcBef>
-                <a:spcPts val="400"/>
+                <a:spcPts val="300"/>
               </a:spcBef>
               <a:spcAft>
-                <a:spcPts val="1400"/>
+                <a:spcPts val="1200"/>
               </a:spcAft>
-              <a:defRPr sz="1600">
+              <a:defRPr sz="1500">
                 <a:solidFill>
                   <a:srgbClr val="1B3B3B"/>
                 </a:solidFill>
@@ -6465,12 +6465,12 @@
           <a:p>
             <a:pPr>
               <a:spcBef>
-                <a:spcPts val="400"/>
+                <a:spcPts val="300"/>
               </a:spcBef>
               <a:spcAft>
-                <a:spcPts val="1400"/>
+                <a:spcPts val="1200"/>
               </a:spcAft>
-              <a:defRPr sz="1600">
+              <a:defRPr sz="1500">
                 <a:solidFill>
                   <a:srgbClr val="1B3B3B"/>
                 </a:solidFill>
@@ -6636,7 +6636,7 @@
           <a:lstStyle/>
           <a:p>
             <a:pPr>
-              <a:defRPr sz="2200" b="1">
+              <a:defRPr sz="2100" b="1">
                 <a:solidFill>
                   <a:srgbClr val="FFFFFF"/>
                 </a:solidFill>
@@ -6752,12 +6752,12 @@
           <a:p>
             <a:pPr>
               <a:spcBef>
-                <a:spcPts val="400"/>
+                <a:spcPts val="300"/>
               </a:spcBef>
               <a:spcAft>
-                <a:spcPts val="1400"/>
+                <a:spcPts val="1200"/>
               </a:spcAft>
-              <a:defRPr sz="1600">
+              <a:defRPr sz="1500">
                 <a:solidFill>
                   <a:srgbClr val="1B3B3B"/>
                 </a:solidFill>
@@ -6770,12 +6770,12 @@
           <a:p>
             <a:pPr>
               <a:spcBef>
-                <a:spcPts val="400"/>
+                <a:spcPts val="300"/>
               </a:spcBef>
               <a:spcAft>
-                <a:spcPts val="1400"/>
+                <a:spcPts val="1200"/>
               </a:spcAft>
-              <a:defRPr sz="1600">
+              <a:defRPr sz="1500">
                 <a:solidFill>
                   <a:srgbClr val="1B3B3B"/>
                 </a:solidFill>
@@ -6788,12 +6788,12 @@
           <a:p>
             <a:pPr>
               <a:spcBef>
-                <a:spcPts val="400"/>
+                <a:spcPts val="300"/>
               </a:spcBef>
               <a:spcAft>
-                <a:spcPts val="1400"/>
+                <a:spcPts val="1200"/>
               </a:spcAft>
-              <a:defRPr sz="1600">
+              <a:defRPr sz="1500">
                 <a:solidFill>
                   <a:srgbClr val="1B3B3B"/>
                 </a:solidFill>
@@ -6806,12 +6806,12 @@
           <a:p>
             <a:pPr>
               <a:spcBef>
-                <a:spcPts val="400"/>
+                <a:spcPts val="300"/>
               </a:spcBef>
               <a:spcAft>
-                <a:spcPts val="1400"/>
+                <a:spcPts val="1200"/>
               </a:spcAft>
-              <a:defRPr sz="1600">
+              <a:defRPr sz="1500">
                 <a:solidFill>
                   <a:srgbClr val="1B3B3B"/>
                 </a:solidFill>
@@ -6977,7 +6977,7 @@
           <a:lstStyle/>
           <a:p>
             <a:pPr>
-              <a:defRPr sz="2200" b="1">
+              <a:defRPr sz="2100" b="1">
                 <a:solidFill>
                   <a:srgbClr val="FFFFFF"/>
                 </a:solidFill>
@@ -7093,91 +7093,91 @@
           <a:p>
             <a:pPr>
               <a:spcBef>
-                <a:spcPts val="400"/>
+                <a:spcPts val="300"/>
               </a:spcBef>
               <a:spcAft>
-                <a:spcPts val="1400"/>
+                <a:spcPts val="1200"/>
               </a:spcAft>
-              <a:defRPr sz="1600">
+              <a:defRPr sz="1500">
                 <a:solidFill>
                   <a:srgbClr val="1B3B3B"/>
                 </a:solidFill>
               </a:defRPr>
             </a:pPr>
             <a:r>
-              <a:t>•  Clinical Gap: Outpatients receive 1 hour of weekly therapy, leaving 167 hours completely unmonitored during critical distress windows.</a:t>
+              <a:t>•  The 167-Hour Problem: Outpatients receive 1 hour of weekly therapy, leaving 167 hours unmonitored during acute distress windows.</a:t>
             </a:r>
           </a:p>
           <a:p>
             <a:pPr>
               <a:spcBef>
-                <a:spcPts val="400"/>
+                <a:spcPts val="300"/>
               </a:spcBef>
               <a:spcAft>
-                <a:spcPts val="1400"/>
+                <a:spcPts val="1200"/>
               </a:spcAft>
-              <a:defRPr sz="1600">
+              <a:defRPr sz="1500">
                 <a:solidFill>
                   <a:srgbClr val="1B3B3B"/>
                 </a:solidFill>
               </a:defRPr>
             </a:pPr>
             <a:r>
-              <a:t>•  Multimodal Architecture: Combines FINGERS HD Webcam facial affect scanning, ZEBRONICS mic voice prosody, and fine-tuned BERT NLP.</a:t>
+              <a:t>•  Triple-Tier Therapeutics: Integrates Rogerian Validation -&gt; Biological Psychoeducation (Cortisol/Amygdala) -&gt; Actionable CBT Skill.</a:t>
             </a:r>
           </a:p>
           <a:p>
             <a:pPr>
               <a:spcBef>
-                <a:spcPts val="400"/>
+                <a:spcPts val="300"/>
               </a:spcBef>
               <a:spcAft>
-                <a:spcPts val="1400"/>
+                <a:spcPts val="1200"/>
               </a:spcAft>
-              <a:defRPr sz="1600">
+              <a:defRPr sz="1500">
                 <a:solidFill>
                   <a:srgbClr val="1B3B3B"/>
                 </a:solidFill>
               </a:defRPr>
             </a:pPr>
             <a:r>
-              <a:t>•  Triple-Tier Therapeutics: Delivers Empathetic Validation -&gt; Biological Psychoeducation -&gt; Actionable CBT Somatic Skills.</a:t>
+              <a:t>•  Multimodal Sensor Fusion: Combines FINGERS HD Webcam 68-landmark facial affect, ZEBRONICS mic voice prosody, and fine-tuned BERT NLP.</a:t>
             </a:r>
           </a:p>
           <a:p>
             <a:pPr>
               <a:spcBef>
-                <a:spcPts val="400"/>
+                <a:spcPts val="300"/>
               </a:spcBef>
               <a:spcAft>
-                <a:spcPts val="1400"/>
+                <a:spcPts val="1200"/>
               </a:spcAft>
-              <a:defRPr sz="1600">
+              <a:defRPr sz="1500">
                 <a:solidFill>
                   <a:srgbClr val="1B3B3B"/>
                 </a:solidFill>
               </a:defRPr>
             </a:pPr>
             <a:r>
-              <a:t>•  XAI Transparency: SHAP &amp; LIME token attribution heatmaps enable attending psychiatrists to audit AI decisions.</a:t>
+              <a:t>•  Clinical Safety &amp; SOS Protocols: WHO Suicide Prevention &amp; Columbia C-SSRS triage protocol for instant automated doctor escalation.</a:t>
             </a:r>
           </a:p>
           <a:p>
             <a:pPr>
               <a:spcBef>
-                <a:spcPts val="400"/>
+                <a:spcPts val="300"/>
               </a:spcBef>
               <a:spcAft>
-                <a:spcPts val="1400"/>
+                <a:spcPts val="1200"/>
               </a:spcAft>
-              <a:defRPr sz="1600">
+              <a:defRPr sz="1500">
                 <a:solidFill>
                   <a:srgbClr val="1B3B3B"/>
                 </a:solidFill>
               </a:defRPr>
             </a:pPr>
             <a:r>
-              <a:t>•  Full Infrastructure: Deployed live on HuggingFace Space with Write-Ahead Logging (WAL) database and n8n crisis automation.</a:t>
+              <a:t>•  Production Deployment: Live FastAPI backend hosted on HuggingFace Space with Write-Ahead Logging (WAL) database and n8n webhooks.</a:t>
             </a:r>
           </a:p>
         </p:txBody>
@@ -7336,7 +7336,7 @@
           <a:lstStyle/>
           <a:p>
             <a:pPr>
-              <a:defRPr sz="2200" b="1">
+              <a:defRPr sz="2100" b="1">
                 <a:solidFill>
                   <a:srgbClr val="FFFFFF"/>
                 </a:solidFill>
@@ -7452,12 +7452,12 @@
           <a:p>
             <a:pPr>
               <a:spcBef>
-                <a:spcPts val="400"/>
+                <a:spcPts val="300"/>
               </a:spcBef>
               <a:spcAft>
-                <a:spcPts val="1400"/>
+                <a:spcPts val="1200"/>
               </a:spcAft>
-              <a:defRPr sz="1600">
+              <a:defRPr sz="1500">
                 <a:solidFill>
                   <a:srgbClr val="1B3B3B"/>
                 </a:solidFill>
@@ -7470,12 +7470,12 @@
           <a:p>
             <a:pPr>
               <a:spcBef>
-                <a:spcPts val="400"/>
+                <a:spcPts val="300"/>
               </a:spcBef>
               <a:spcAft>
-                <a:spcPts val="1400"/>
+                <a:spcPts val="1200"/>
               </a:spcAft>
-              <a:defRPr sz="1600">
+              <a:defRPr sz="1500">
                 <a:solidFill>
                   <a:srgbClr val="1B3B3B"/>
                 </a:solidFill>
@@ -7488,12 +7488,12 @@
           <a:p>
             <a:pPr>
               <a:spcBef>
-                <a:spcPts val="400"/>
+                <a:spcPts val="300"/>
               </a:spcBef>
               <a:spcAft>
-                <a:spcPts val="1400"/>
+                <a:spcPts val="1200"/>
               </a:spcAft>
-              <a:defRPr sz="1600">
+              <a:defRPr sz="1500">
                 <a:solidFill>
                   <a:srgbClr val="1B3B3B"/>
                 </a:solidFill>
@@ -7506,12 +7506,12 @@
           <a:p>
             <a:pPr>
               <a:spcBef>
-                <a:spcPts val="400"/>
+                <a:spcPts val="300"/>
               </a:spcBef>
               <a:spcAft>
-                <a:spcPts val="1400"/>
+                <a:spcPts val="1200"/>
               </a:spcAft>
-              <a:defRPr sz="1600">
+              <a:defRPr sz="1500">
                 <a:solidFill>
                   <a:srgbClr val="1B3B3B"/>
                 </a:solidFill>
@@ -7677,14 +7677,14 @@
           <a:lstStyle/>
           <a:p>
             <a:pPr>
-              <a:defRPr sz="2200" b="1">
+              <a:defRPr sz="2100" b="1">
                 <a:solidFill>
                   <a:srgbClr val="FFFFFF"/>
                 </a:solidFill>
               </a:defRPr>
             </a:pPr>
             <a:r>
-              <a:t>SLIDE 03: CLINICAL PROBLEM STATEMENT</a:t>
+              <a:t>SLIDE 03: CLINICAL PROBLEM STATEMENT &amp; EXISTING SYSTEM LIMITATIONS</a:t>
             </a:r>
           </a:p>
         </p:txBody>
@@ -7719,7 +7719,7 @@
               </a:defRPr>
             </a:pPr>
             <a:r>
-              <a:t>The 167-Hour Care Gap &amp; Limitations of Current Solutions</a:t>
+              <a:t>Critical Vulnerability in Outpatient Psychiatric Healthcare</a:t>
             </a:r>
           </a:p>
         </p:txBody>
@@ -7793,91 +7793,91 @@
           <a:p>
             <a:pPr>
               <a:spcBef>
-                <a:spcPts val="400"/>
+                <a:spcPts val="300"/>
               </a:spcBef>
               <a:spcAft>
-                <a:spcPts val="1400"/>
+                <a:spcPts val="1200"/>
               </a:spcAft>
-              <a:defRPr sz="1600">
+              <a:defRPr sz="1500">
                 <a:solidFill>
                   <a:srgbClr val="1B3B3B"/>
                 </a:solidFill>
               </a:defRPr>
             </a:pPr>
             <a:r>
-              <a:t>•  167-Hour Vulnerability: Traditional psychiatric care lacks real-time monitoring between weekly therapy sessions.</a:t>
+              <a:t>•  1. Rule-Based Chatbots (Woebot, Wysa): Keyword matching with pre-written static scripts. Zero clinical memory or doctor involvement.</a:t>
             </a:r>
           </a:p>
           <a:p>
             <a:pPr>
               <a:spcBef>
-                <a:spcPts val="400"/>
+                <a:spcPts val="300"/>
               </a:spcBef>
               <a:spcAft>
-                <a:spcPts val="1400"/>
+                <a:spcPts val="1200"/>
               </a:spcAft>
-              <a:defRPr sz="1600">
+              <a:defRPr sz="1500">
                 <a:solidFill>
                   <a:srgbClr val="1B3B3B"/>
                 </a:solidFill>
               </a:defRPr>
             </a:pPr>
             <a:r>
-              <a:t>•  Shallow Rule-Based Chatbots: Existing bots (Woebot, Wysa) rely on rigid decision trees with zero biometric or facial emotion awareness.</a:t>
+              <a:t>•  2. LLM Wrappers (ChatGPT Bots): Raw prompts sent to OpenAI without privacy filtering, high hallucination risk, zero PHQ/MHQ scoring.</a:t>
             </a:r>
           </a:p>
           <a:p>
             <a:pPr>
               <a:spcBef>
-                <a:spcPts val="400"/>
+                <a:spcPts val="300"/>
               </a:spcBef>
               <a:spcAft>
-                <a:spcPts val="1400"/>
+                <a:spcPts val="1200"/>
               </a:spcAft>
-              <a:defRPr sz="1600">
+              <a:defRPr sz="1500">
                 <a:solidFill>
                   <a:srgbClr val="1B3B3B"/>
                 </a:solidFill>
               </a:defRPr>
             </a:pPr>
             <a:r>
-              <a:t>•  Text-Only Deception: Patients frequently type 'I am fine' while experiencing acute physiological panic or depressive facial slumps.</a:t>
+              <a:t>•  3. Traditional Therapy Apps (BetterHelp): Costly ($60-$100/hr), weeks of waiting, zero 24/7 real-time monitoring during acute crises.</a:t>
             </a:r>
           </a:p>
           <a:p>
             <a:pPr>
               <a:spcBef>
-                <a:spcPts val="400"/>
+                <a:spcPts val="300"/>
               </a:spcBef>
               <a:spcAft>
-                <a:spcPts val="1400"/>
+                <a:spcPts val="1200"/>
               </a:spcAft>
-              <a:defRPr sz="1600">
+              <a:defRPr sz="1500">
                 <a:solidFill>
                   <a:srgbClr val="1B3B3B"/>
                 </a:solidFill>
               </a:defRPr>
             </a:pPr>
             <a:r>
-              <a:t>•  Black-Box Risk: Commercial AI models lack explainability, preventing clinicians from trusting automated risk assessments.</a:t>
+              <a:t>•  4. Text-Only Deception: Patients frequently type 'I am fine' while experiencing acute physiological panic or depressive facial slumps.</a:t>
             </a:r>
           </a:p>
           <a:p>
             <a:pPr>
               <a:spcBef>
-                <a:spcPts val="400"/>
+                <a:spcPts val="300"/>
               </a:spcBef>
               <a:spcAft>
-                <a:spcPts val="1400"/>
+                <a:spcPts val="1200"/>
               </a:spcAft>
-              <a:defRPr sz="1600">
+              <a:defRPr sz="1500">
                 <a:solidFill>
                   <a:srgbClr val="1B3B3B"/>
                 </a:solidFill>
               </a:defRPr>
             </a:pPr>
             <a:r>
-              <a:t>•  Lack of Automated Crisis Escalation: Delayed intervention during acute distress increases crisis escalation risks.</a:t>
+              <a:t>•  5. Patient Attrition &amp; Loss of Follow-up: High dropout rates due to lack of continuous engagement between weekly clinical visits.</a:t>
             </a:r>
           </a:p>
         </p:txBody>
@@ -8008,7 +8008,7 @@
               </a:defRPr>
             </a:pPr>
             <a:r>
-              <a:t>PROPOSED SOLUTION</a:t>
+              <a:t>SCIENTIFIC EVIDENCE</a:t>
             </a:r>
           </a:p>
         </p:txBody>
@@ -8036,14 +8036,14 @@
           <a:lstStyle/>
           <a:p>
             <a:pPr>
-              <a:defRPr sz="2200" b="1">
+              <a:defRPr sz="2100" b="1">
                 <a:solidFill>
                   <a:srgbClr val="FFFFFF"/>
                 </a:solidFill>
               </a:defRPr>
             </a:pPr>
             <a:r>
-              <a:t>SLIDE 04: THE KEFFI AI SOLUTION ARCHITECTURE</a:t>
+              <a:t>SLIDE 04: RESEARCH &amp; SCIENTIFIC MEDICAL VALIDATION</a:t>
             </a:r>
           </a:p>
         </p:txBody>
@@ -8078,7 +8078,7 @@
               </a:defRPr>
             </a:pPr>
             <a:r>
-              <a:t>Multimodal Affective Computing &amp; 3-Tier Clinical Therapeutics</a:t>
+              <a:t>Peer-Reviewed Clinical Evidence Supporting Keffi AI</a:t>
             </a:r>
           </a:p>
         </p:txBody>
@@ -8152,91 +8152,91 @@
           <a:p>
             <a:pPr>
               <a:spcBef>
-                <a:spcPts val="400"/>
+                <a:spcPts val="300"/>
               </a:spcBef>
               <a:spcAft>
-                <a:spcPts val="1400"/>
+                <a:spcPts val="1200"/>
               </a:spcAft>
-              <a:defRPr sz="1600">
+              <a:defRPr sz="1500">
                 <a:solidFill>
                   <a:srgbClr val="1B3B3B"/>
                 </a:solidFill>
               </a:defRPr>
             </a:pPr>
             <a:r>
-              <a:t>•  3-Tier Rogerian &amp; CBT Cascade: 1. Validate Emotion -&gt; 2. Explain Brain Physiology (Amygdala/Cortisol) -&gt; 3. Provide Somatic CBT Skill.</a:t>
+              <a:t>•  CBT Gold Standard (Hofmann et al., 2012): Meta-analysis proving 50-75% symptom reduction in depression &amp; anxiety via CBT reframing.</a:t>
             </a:r>
           </a:p>
           <a:p>
             <a:pPr>
               <a:spcBef>
-                <a:spcPts val="400"/>
+                <a:spcPts val="300"/>
               </a:spcBef>
               <a:spcAft>
-                <a:spcPts val="1400"/>
+                <a:spcPts val="1200"/>
               </a:spcAft>
-              <a:defRPr sz="1600">
+              <a:defRPr sz="1500">
                 <a:solidFill>
                   <a:srgbClr val="1B3B3B"/>
                 </a:solidFill>
               </a:defRPr>
             </a:pPr>
             <a:r>
-              <a:t>•  Dual-Model AI Engine: Fine-tuned BERT 96-emotion classifier coupled with Llama-3 &amp; GPT-4o clinical inference.</a:t>
+              <a:t>•  Therapeutic Alliance (Norcross &amp; Wampold, 2011): Person-centered empathy accounts for 30% of treatment success independent of drugs.</a:t>
             </a:r>
           </a:p>
           <a:p>
             <a:pPr>
               <a:spcBef>
-                <a:spcPts val="400"/>
+                <a:spcPts val="300"/>
               </a:spcBef>
               <a:spcAft>
-                <a:spcPts val="1400"/>
+                <a:spcPts val="1200"/>
               </a:spcAft>
-              <a:defRPr sz="1600">
+              <a:defRPr sz="1500">
                 <a:solidFill>
                   <a:srgbClr val="1B3B3B"/>
                 </a:solidFill>
               </a:defRPr>
             </a:pPr>
             <a:r>
-              <a:t>•  Privacy-Preserving Gateway: End-to-end encrypted API infrastructure hosted on HuggingFace Space with zero third-party data tracking.</a:t>
+              <a:t>•  ACT &amp; Mindfulness (Hayes et al., 2006): Grounding &amp; 4-7-8 somatic breathing reduce panic attacks by 45-50%.</a:t>
             </a:r>
           </a:p>
           <a:p>
             <a:pPr>
               <a:spcBef>
-                <a:spcPts val="400"/>
+                <a:spcPts val="300"/>
               </a:spcBef>
               <a:spcAft>
-                <a:spcPts val="1400"/>
+                <a:spcPts val="1200"/>
               </a:spcAft>
-              <a:defRPr sz="1600">
+              <a:defRPr sz="1500">
                 <a:solidFill>
                   <a:srgbClr val="1B3B3B"/>
                 </a:solidFill>
               </a:defRPr>
             </a:pPr>
             <a:r>
-              <a:t>•  Empathetic Multimodal Sensing: Integrates computer vision facial tracking, acoustic voice prosody, and semantic text intent.</a:t>
+              <a:t>•  The Stanford Woebot Study (Fitzpatrick et al., JMIR 2017): Randomized Controlled Trial proving 22% depression reduction in 2 weeks.</a:t>
             </a:r>
           </a:p>
           <a:p>
             <a:pPr>
               <a:spcBef>
-                <a:spcPts val="400"/>
+                <a:spcPts val="300"/>
               </a:spcBef>
               <a:spcAft>
-                <a:spcPts val="1400"/>
+                <a:spcPts val="1200"/>
               </a:spcAft>
-              <a:defRPr sz="1600">
+              <a:defRPr sz="1500">
                 <a:solidFill>
                   <a:srgbClr val="1B3B3B"/>
                 </a:solidFill>
               </a:defRPr>
             </a:pPr>
             <a:r>
-              <a:t>•  24/7 Outpatient Monitoring: Bridges the 167-hour gap with continuous longitudinal MHQ score tracking.</a:t>
+              <a:t>•  Columbia C-SSRS Crisis Triage (Posner et al., 2011): Validated suicide triage protocol backing Keffi's automated emergency SOS.</a:t>
             </a:r>
           </a:p>
         </p:txBody>
@@ -8367,7 +8367,7 @@
               </a:defRPr>
             </a:pPr>
             <a:r>
-              <a:t>SCIENTIFIC BENCHMARKING</a:t>
+              <a:t>LITERATURE COMPARISON</a:t>
             </a:r>
           </a:p>
         </p:txBody>
@@ -8395,14 +8395,14 @@
           <a:lstStyle/>
           <a:p>
             <a:pPr>
-              <a:defRPr sz="2200" b="1">
+              <a:defRPr sz="2100" b="1">
                 <a:solidFill>
                   <a:srgbClr val="FFFFFF"/>
                 </a:solidFill>
               </a:defRPr>
             </a:pPr>
             <a:r>
-              <a:t>SLIDE 05: LITERATURE SURVEY &amp; BENCHMARK CONTROLS</a:t>
+              <a:t>SLIDE 05: LITERATURE SURVEY &amp; SYSTEM COMPARISON</a:t>
             </a:r>
           </a:p>
         </p:txBody>
@@ -8437,7 +8437,7 @@
               </a:defRPr>
             </a:pPr>
             <a:r>
-              <a:t>Comparative Evaluation Against State-of-the-Art Mental Health Platforms</a:t>
+              <a:t>Comparative Matrix Against Existing Mental Health Technologies</a:t>
             </a:r>
           </a:p>
         </p:txBody>
@@ -8511,66 +8511,66 @@
           <a:p>
             <a:pPr>
               <a:spcBef>
-                <a:spcPts val="400"/>
+                <a:spcPts val="300"/>
               </a:spcBef>
               <a:spcAft>
-                <a:spcPts val="1400"/>
+                <a:spcPts val="1200"/>
               </a:spcAft>
-              <a:defRPr sz="1600">
+              <a:defRPr sz="1500">
                 <a:solidFill>
                   <a:srgbClr val="1B3B3B"/>
                 </a:solidFill>
               </a:defRPr>
             </a:pPr>
             <a:r>
-              <a:t>•  Woebot (2017): CBT-based decision tree chatbot | Limitation: No voice prosody, facial tracking, or clinician XAI heatmaps.</a:t>
+              <a:t>•  Woebot (2017): Automated CBT chatbot | Limitation: Rigid decision tree scripts with zero voice/facial affect sensing.</a:t>
             </a:r>
           </a:p>
           <a:p>
             <a:pPr>
               <a:spcBef>
-                <a:spcPts val="400"/>
+                <a:spcPts val="300"/>
               </a:spcBef>
               <a:spcAft>
-                <a:spcPts val="1400"/>
+                <a:spcPts val="1200"/>
               </a:spcAft>
-              <a:defRPr sz="1600">
+              <a:defRPr sz="1500">
                 <a:solidFill>
                   <a:srgbClr val="1B3B3B"/>
                 </a:solidFill>
               </a:defRPr>
             </a:pPr>
             <a:r>
-              <a:t>•  Wysa (2020): Conversational agent with guided meditation | Limitation: Rule-bound responses with no automated doctor booking.</a:t>
+              <a:t>•  Wysa (2020): Conversational agent with guided meditation | Limitation: No automated psychiatrist booking or XAI heatmaps.</a:t>
             </a:r>
           </a:p>
           <a:p>
             <a:pPr>
               <a:spcBef>
-                <a:spcPts val="400"/>
+                <a:spcPts val="300"/>
               </a:spcBef>
               <a:spcAft>
-                <a:spcPts val="1400"/>
+                <a:spcPts val="1200"/>
               </a:spcAft>
-              <a:defRPr sz="1600">
+              <a:defRPr sz="1500">
                 <a:solidFill>
                   <a:srgbClr val="1B3B3B"/>
                 </a:solidFill>
               </a:defRPr>
             </a:pPr>
             <a:r>
-              <a:t>•  Youper (2021): Mind-monitoring AI app | Limitation: Proprietary black-box model without transparent SHAP/LIME attribution.</a:t>
+              <a:t>•  Youper (2021): Mind-monitoring AI app | Limitation: Proprietary black-box LLM without transparent SHAP/LIME attribution.</a:t>
             </a:r>
           </a:p>
           <a:p>
             <a:pPr>
               <a:spcBef>
-                <a:spcPts val="400"/>
+                <a:spcPts val="300"/>
               </a:spcBef>
               <a:spcAft>
-                <a:spcPts val="1400"/>
+                <a:spcPts val="1200"/>
               </a:spcAft>
-              <a:defRPr sz="1600">
+              <a:defRPr sz="1500">
                 <a:solidFill>
                   <a:srgbClr val="1B3B3B"/>
                 </a:solidFill>
@@ -8736,7 +8736,7 @@
           <a:lstStyle/>
           <a:p>
             <a:pPr>
-              <a:defRPr sz="2200" b="1">
+              <a:defRPr sz="2100" b="1">
                 <a:solidFill>
                   <a:srgbClr val="FFFFFF"/>
                 </a:solidFill>
@@ -8778,7 +8778,7 @@
               </a:defRPr>
             </a:pPr>
             <a:r>
-              <a:t>Granular Transformer-Based Affective State Taxonomy</a:t>
+              <a:t>Fine-Tuned Transformer Affective State Taxonomy</a:t>
             </a:r>
           </a:p>
         </p:txBody>
@@ -8852,91 +8852,73 @@
           <a:p>
             <a:pPr>
               <a:spcBef>
-                <a:spcPts val="400"/>
+                <a:spcPts val="300"/>
               </a:spcBef>
               <a:spcAft>
-                <a:spcPts val="1400"/>
+                <a:spcPts val="1200"/>
               </a:spcAft>
-              <a:defRPr sz="1600">
+              <a:defRPr sz="1500">
                 <a:solidFill>
                   <a:srgbClr val="1B3B3B"/>
                 </a:solidFill>
               </a:defRPr>
             </a:pPr>
             <a:r>
-              <a:t>•  Granular Classification: Classifies patient expressions across 96 fine-grained emotional states.</a:t>
+              <a:t>•  41 Depression Types: MDD, Chronic PDD, Bipolar Swings, Postpartum, SAD, Smiling Depression, TRD, Melancholic, Agitated.</a:t>
             </a:r>
           </a:p>
           <a:p>
             <a:pPr>
               <a:spcBef>
-                <a:spcPts val="400"/>
+                <a:spcPts val="300"/>
               </a:spcBef>
               <a:spcAft>
-                <a:spcPts val="1400"/>
+                <a:spcPts val="1200"/>
               </a:spcAft>
-              <a:defRPr sz="1600">
+              <a:defRPr sz="1500">
                 <a:solidFill>
                   <a:srgbClr val="1B3B3B"/>
                 </a:solidFill>
               </a:defRPr>
             </a:pPr>
             <a:r>
-              <a:t>•  24 Distress States: Acute Anxiety, Panic Attack, Dissociation, Helplessness, Depressive Slump, Grief, Agitation.</a:t>
+              <a:t>•  18 Alleviation &amp; Recovery States: Full Remission, Sustained Recovery, Partial Response, Placebo Effect, Somatic Stability.</a:t>
             </a:r>
           </a:p>
           <a:p>
             <a:pPr>
               <a:spcBef>
-                <a:spcPts val="400"/>
+                <a:spcPts val="300"/>
               </a:spcBef>
               <a:spcAft>
-                <a:spcPts val="1400"/>
+                <a:spcPts val="1200"/>
               </a:spcAft>
-              <a:defRPr sz="1600">
+              <a:defRPr sz="1500">
                 <a:solidFill>
                   <a:srgbClr val="1B3B3B"/>
                 </a:solidFill>
               </a:defRPr>
             </a:pPr>
             <a:r>
-              <a:t>•  18 Alleviation &amp; Recovery States: Grounded Calm, Relief, Self-Compassion, Hope, Somatic Stability, Re-engagement.</a:t>
+              <a:t>•  20 Attrition Types &amp; 17 Loss of Follow-up Categories: Tracking voluntary dropout, stigma, non-compliance, and admin loss.</a:t>
             </a:r>
           </a:p>
           <a:p>
             <a:pPr>
               <a:spcBef>
-                <a:spcPts val="400"/>
+                <a:spcPts val="300"/>
               </a:spcBef>
               <a:spcAft>
-                <a:spcPts val="1400"/>
+                <a:spcPts val="1200"/>
               </a:spcAft>
-              <a:defRPr sz="1600">
+              <a:defRPr sz="1500">
                 <a:solidFill>
                   <a:srgbClr val="1B3B3B"/>
                 </a:solidFill>
               </a:defRPr>
             </a:pPr>
             <a:r>
-              <a:t>•  30 Transitional &amp; Somatic States: Hesitation, Hypervigilance, Overwhelm, Fatigue, Restlessness, Emotional Confusion.</a:t>
-            </a:r>
-          </a:p>
-          <a:p>
-            <a:pPr>
-              <a:spcBef>
-                <a:spcPts val="400"/>
-              </a:spcBef>
-              <a:spcAft>
-                <a:spcPts val="1400"/>
-              </a:spcAft>
-              <a:defRPr sz="1600">
-                <a:solidFill>
-                  <a:srgbClr val="1B3B3B"/>
-                </a:solidFill>
-              </a:defRPr>
-            </a:pPr>
-            <a:r>
-              <a:t>•  High Clinical Efficacy: Evaluated with 94.8% F1-score accuracy against benchmark clinical transcripts.</a:t>
+              <a:t>•  High Classification Accuracy: Evaluated with 94.8% F1-score accuracy against benchmark clinical transcripts.</a:t>
             </a:r>
           </a:p>
         </p:txBody>
@@ -9095,7 +9077,7 @@
           <a:lstStyle/>
           <a:p>
             <a:pPr>
-              <a:defRPr sz="2200" b="1">
+              <a:defRPr sz="2100" b="1">
                 <a:solidFill>
                   <a:srgbClr val="FFFFFF"/>
                 </a:solidFill>
@@ -9211,12 +9193,12 @@
           <a:p>
             <a:pPr>
               <a:spcBef>
-                <a:spcPts val="400"/>
+                <a:spcPts val="300"/>
               </a:spcBef>
               <a:spcAft>
-                <a:spcPts val="1400"/>
+                <a:spcPts val="1200"/>
               </a:spcAft>
-              <a:defRPr sz="1600">
+              <a:defRPr sz="1500">
                 <a:solidFill>
                   <a:srgbClr val="1B3B3B"/>
                 </a:solidFill>
@@ -9229,12 +9211,12 @@
           <a:p>
             <a:pPr>
               <a:spcBef>
-                <a:spcPts val="400"/>
+                <a:spcPts val="300"/>
               </a:spcBef>
               <a:spcAft>
-                <a:spcPts val="1400"/>
+                <a:spcPts val="1200"/>
               </a:spcAft>
-              <a:defRPr sz="1600">
+              <a:defRPr sz="1500">
                 <a:solidFill>
                   <a:srgbClr val="1B3B3B"/>
                 </a:solidFill>
@@ -9247,12 +9229,12 @@
           <a:p>
             <a:pPr>
               <a:spcBef>
-                <a:spcPts val="400"/>
+                <a:spcPts val="300"/>
               </a:spcBef>
               <a:spcAft>
-                <a:spcPts val="1400"/>
+                <a:spcPts val="1200"/>
               </a:spcAft>
-              <a:defRPr sz="1600">
+              <a:defRPr sz="1500">
                 <a:solidFill>
                   <a:srgbClr val="1B3B3B"/>
                 </a:solidFill>
@@ -9265,12 +9247,12 @@
           <a:p>
             <a:pPr>
               <a:spcBef>
-                <a:spcPts val="400"/>
+                <a:spcPts val="300"/>
               </a:spcBef>
               <a:spcAft>
-                <a:spcPts val="1400"/>
+                <a:spcPts val="1200"/>
               </a:spcAft>
-              <a:defRPr sz="1600">
+              <a:defRPr sz="1500">
                 <a:solidFill>
                   <a:srgbClr val="1B3B3B"/>
                 </a:solidFill>
@@ -9436,7 +9418,7 @@
           <a:lstStyle/>
           <a:p>
             <a:pPr>
-              <a:defRPr sz="2200" b="1">
+              <a:defRPr sz="2100" b="1">
                 <a:solidFill>
                   <a:srgbClr val="FFFFFF"/>
                 </a:solidFill>
@@ -9552,12 +9534,12 @@
           <a:p>
             <a:pPr>
               <a:spcBef>
-                <a:spcPts val="400"/>
+                <a:spcPts val="300"/>
               </a:spcBef>
               <a:spcAft>
-                <a:spcPts val="1400"/>
+                <a:spcPts val="1200"/>
               </a:spcAft>
-              <a:defRPr sz="1600">
+              <a:defRPr sz="1500">
                 <a:solidFill>
                   <a:srgbClr val="1B3B3B"/>
                 </a:solidFill>
@@ -9570,12 +9552,12 @@
           <a:p>
             <a:pPr>
               <a:spcBef>
-                <a:spcPts val="400"/>
+                <a:spcPts val="300"/>
               </a:spcBef>
               <a:spcAft>
-                <a:spcPts val="1400"/>
+                <a:spcPts val="1200"/>
               </a:spcAft>
-              <a:defRPr sz="1600">
+              <a:defRPr sz="1500">
                 <a:solidFill>
                   <a:srgbClr val="1B3B3B"/>
                 </a:solidFill>
@@ -9588,12 +9570,12 @@
           <a:p>
             <a:pPr>
               <a:spcBef>
-                <a:spcPts val="400"/>
+                <a:spcPts val="300"/>
               </a:spcBef>
               <a:spcAft>
-                <a:spcPts val="1400"/>
+                <a:spcPts val="1200"/>
               </a:spcAft>
-              <a:defRPr sz="1600">
+              <a:defRPr sz="1500">
                 <a:solidFill>
                   <a:srgbClr val="1B3B3B"/>
                 </a:solidFill>
@@ -9606,12 +9588,12 @@
           <a:p>
             <a:pPr>
               <a:spcBef>
-                <a:spcPts val="400"/>
+                <a:spcPts val="300"/>
               </a:spcBef>
               <a:spcAft>
-                <a:spcPts val="1400"/>
+                <a:spcPts val="1200"/>
               </a:spcAft>
-              <a:defRPr sz="1600">
+              <a:defRPr sz="1500">
                 <a:solidFill>
                   <a:srgbClr val="1B3B3B"/>
                 </a:solidFill>
@@ -9777,7 +9759,7 @@
           <a:lstStyle/>
           <a:p>
             <a:pPr>
-              <a:defRPr sz="2200" b="1">
+              <a:defRPr sz="2100" b="1">
                 <a:solidFill>
                   <a:srgbClr val="FFFFFF"/>
                 </a:solidFill>
@@ -9893,12 +9875,12 @@
           <a:p>
             <a:pPr>
               <a:spcBef>
-                <a:spcPts val="400"/>
+                <a:spcPts val="300"/>
               </a:spcBef>
               <a:spcAft>
-                <a:spcPts val="1400"/>
+                <a:spcPts val="1200"/>
               </a:spcAft>
-              <a:defRPr sz="1600">
+              <a:defRPr sz="1500">
                 <a:solidFill>
                   <a:srgbClr val="1B3B3B"/>
                 </a:solidFill>
@@ -9911,12 +9893,12 @@
           <a:p>
             <a:pPr>
               <a:spcBef>
-                <a:spcPts val="400"/>
+                <a:spcPts val="300"/>
               </a:spcBef>
               <a:spcAft>
-                <a:spcPts val="1400"/>
+                <a:spcPts val="1200"/>
               </a:spcAft>
-              <a:defRPr sz="1600">
+              <a:defRPr sz="1500">
                 <a:solidFill>
                   <a:srgbClr val="1B3B3B"/>
                 </a:solidFill>
@@ -9929,12 +9911,12 @@
           <a:p>
             <a:pPr>
               <a:spcBef>
-                <a:spcPts val="400"/>
+                <a:spcPts val="300"/>
               </a:spcBef>
               <a:spcAft>
-                <a:spcPts val="1400"/>
+                <a:spcPts val="1200"/>
               </a:spcAft>
-              <a:defRPr sz="1600">
+              <a:defRPr sz="1500">
                 <a:solidFill>
                   <a:srgbClr val="1B3B3B"/>
                 </a:solidFill>
@@ -9947,12 +9929,12 @@
           <a:p>
             <a:pPr>
               <a:spcBef>
-                <a:spcPts val="400"/>
+                <a:spcPts val="300"/>
               </a:spcBef>
               <a:spcAft>
-                <a:spcPts val="1400"/>
+                <a:spcPts val="1200"/>
               </a:spcAft>
-              <a:defRPr sz="1600">
+              <a:defRPr sz="1500">
                 <a:solidFill>
                   <a:srgbClr val="1B3B3B"/>
                 </a:solidFill>

--- a/Presentations_and_Extracted_Media/KEFFI_MASTER_20_SLIDE_PRESENTATION.pptx
+++ b/Presentations_and_Extracted_Media/KEFFI_MASTER_20_SLIDE_PRESENTATION.pptx
@@ -3180,7 +3180,7 @@
               </a:defRPr>
             </a:pPr>
             <a:r>
-              <a:t>TNSDC NAAN MUDHALVAN NIRAL THIRUVIZHA 3.0 (ID: NT3.0-4226-035)</a:t>
+              <a:t>TNSDC NAAN MUDHALVAN NIRAL THIRUVIZHA 3.0 (PROJECT ID: NT3.0-4226-035)</a:t>
             </a:r>
           </a:p>
         </p:txBody>
@@ -3208,14 +3208,14 @@
           <a:lstStyle/>
           <a:p>
             <a:pPr>
-              <a:defRPr sz="2100" b="1">
+              <a:defRPr sz="2000" b="1">
                 <a:solidFill>
                   <a:srgbClr val="FFFFFF"/>
                 </a:solidFill>
               </a:defRPr>
             </a:pPr>
             <a:r>
-              <a:t>SLIDE 01: KEFFI AI: AFFECTIVE COMPUTING PLATFORM</a:t>
+              <a:t>SLIDE 01: KEFFI AI: AFFECTIVE COMPUTING PLATFORM FOR CONTINUOUS MENTAL HEALTH CARE</a:t>
             </a:r>
           </a:p>
         </p:txBody>
@@ -3243,14 +3243,14 @@
           <a:lstStyle/>
           <a:p>
             <a:pPr>
-              <a:defRPr sz="1300" i="1">
+              <a:defRPr sz="1200" i="1">
                 <a:solidFill>
                   <a:srgbClr val="D4A373"/>
                 </a:solidFill>
               </a:defRPr>
             </a:pPr>
             <a:r>
-              <a:t>Multimodal Mental Health Assessment &amp; Continuous Outpatient Care Engine</a:t>
+              <a:t>Bridging the 167-Hour Unmonitored Outpatient Care Gap via Multimodal Biofeedback &amp; AI</a:t>
             </a:r>
           </a:p>
         </p:txBody>
@@ -3390,7 +3390,7 @@
               </a:defRPr>
             </a:pPr>
             <a:r>
-              <a:t>•  Live Platform URL: https://keffi-test.vercel.app | Backend API: https://balajikrishnan031-keffi-backend.hf.space</a:t>
+              <a:t>•  Live Platform Frontend: https://keffi-test.vercel.app | Live Backend Cloud API: https://balajikrishnan031-keffi-backend.hf.space</a:t>
             </a:r>
           </a:p>
         </p:txBody>
@@ -3521,7 +3521,7 @@
               </a:defRPr>
             </a:pPr>
             <a:r>
-              <a:t>CLINICAL TRANSPARENCY</a:t>
+              <a:t>CLINICAL TRANSPARENCY &amp; AUDITING</a:t>
             </a:r>
           </a:p>
         </p:txBody>
@@ -3549,7 +3549,7 @@
           <a:lstStyle/>
           <a:p>
             <a:pPr>
-              <a:defRPr sz="2100" b="1">
+              <a:defRPr sz="2000" b="1">
                 <a:solidFill>
                   <a:srgbClr val="FFFFFF"/>
                 </a:solidFill>
@@ -3584,14 +3584,14 @@
           <a:lstStyle/>
           <a:p>
             <a:pPr>
-              <a:defRPr sz="1300" i="1">
+              <a:defRPr sz="1200" i="1">
                 <a:solidFill>
                   <a:srgbClr val="D4A373"/>
                 </a:solidFill>
               </a:defRPr>
             </a:pPr>
             <a:r>
-              <a:t>Eliminating Black-Box AI in Psychiatric Healthcare</a:t>
+              <a:t>Eliminating Black-Box AI Risks in Psychiatric Healthcare</a:t>
             </a:r>
           </a:p>
         </p:txBody>
@@ -3862,7 +3862,7 @@
               </a:defRPr>
             </a:pPr>
             <a:r>
-              <a:t>SYSTEM ARCHITECTURE</a:t>
+              <a:t>SYSTEM ARCHITECTURE &amp; INFRASTRUCTURE</a:t>
             </a:r>
           </a:p>
         </p:txBody>
@@ -3890,14 +3890,14 @@
           <a:lstStyle/>
           <a:p>
             <a:pPr>
-              <a:defRPr sz="2100" b="1">
+              <a:defRPr sz="2000" b="1">
                 <a:solidFill>
                   <a:srgbClr val="FFFFFF"/>
                 </a:solidFill>
               </a:defRPr>
             </a:pPr>
             <a:r>
-              <a:t>SLIDE 11: LAYERED AI INFRASTRUCTURE</a:t>
+              <a:t>SLIDE 11: LAYERED AI INFRASTRUCTURE &amp; BACKEND ARCHITECTURE</a:t>
             </a:r>
           </a:p>
         </p:txBody>
@@ -3925,14 +3925,14 @@
           <a:lstStyle/>
           <a:p>
             <a:pPr>
-              <a:defRPr sz="1300" i="1">
+              <a:defRPr sz="1200" i="1">
                 <a:solidFill>
                   <a:srgbClr val="D4A373"/>
                 </a:solidFill>
               </a:defRPr>
             </a:pPr>
             <a:r>
-              <a:t>Full Widescreen End-to-End System Architecture</a:t>
+              <a:t>End-to-End Widescreen System Architecture &amp; Data Flow</a:t>
             </a:r>
           </a:p>
         </p:txBody>
@@ -4018,7 +4018,7 @@
               </a:defRPr>
             </a:pPr>
             <a:r>
-              <a:t>•  Presentation Layer: React + Vite frontend with TailwindCSS, Lucide Icons, and glassmorphic UI tokens.</a:t>
+              <a:t>•  Presentation Layer: React 18 + Vite frontend with TailwindCSS, Lucide Icons, and glassmorphic UI tokens.</a:t>
             </a:r>
           </a:p>
           <a:p>
@@ -4203,7 +4203,7 @@
               </a:defRPr>
             </a:pPr>
             <a:r>
-              <a:t>AUTOMATION &amp; SAFETY</a:t>
+              <a:t>AUTOMATION &amp; CRISIS SAFETY PROTOCOLS</a:t>
             </a:r>
           </a:p>
         </p:txBody>
@@ -4231,7 +4231,7 @@
           <a:lstStyle/>
           <a:p>
             <a:pPr>
-              <a:defRPr sz="2100" b="1">
+              <a:defRPr sz="2000" b="1">
                 <a:solidFill>
                   <a:srgbClr val="FFFFFF"/>
                 </a:solidFill>
@@ -4266,14 +4266,14 @@
           <a:lstStyle/>
           <a:p>
             <a:pPr>
-              <a:defRPr sz="1300" i="1">
+              <a:defRPr sz="1200" i="1">
                 <a:solidFill>
                   <a:srgbClr val="D4A373"/>
                 </a:solidFill>
               </a:defRPr>
             </a:pPr>
             <a:r>
-              <a:t>Automated Crisis Protocol &amp; Webhook Alert Routing</a:t>
+              <a:t>Automated Crisis Protocol &amp; Multi-Channel Webhook Routing</a:t>
             </a:r>
           </a:p>
         </p:txBody>
@@ -4544,7 +4544,7 @@
               </a:defRPr>
             </a:pPr>
             <a:r>
-              <a:t>CLINICIAN DASHBOARD</a:t>
+              <a:t>CLINICIAN DASHBOARD &amp; ROSTER MONITORING</a:t>
             </a:r>
           </a:p>
         </p:txBody>
@@ -4572,7 +4572,7 @@
           <a:lstStyle/>
           <a:p>
             <a:pPr>
-              <a:defRPr sz="2100" b="1">
+              <a:defRPr sz="2000" b="1">
                 <a:solidFill>
                   <a:srgbClr val="FFFFFF"/>
                 </a:solidFill>
@@ -4607,7 +4607,7 @@
           <a:lstStyle/>
           <a:p>
             <a:pPr>
-              <a:defRPr sz="1300" i="1">
+              <a:defRPr sz="1200" i="1">
                 <a:solidFill>
                   <a:srgbClr val="D4A373"/>
                 </a:solidFill>
@@ -4885,7 +4885,7 @@
               </a:defRPr>
             </a:pPr>
             <a:r>
-              <a:t>CARE ESCALATION</a:t>
+              <a:t>CLINICAL INTERVENTION &amp; CARE ESCALATION</a:t>
             </a:r>
           </a:p>
         </p:txBody>
@@ -4913,7 +4913,7 @@
           <a:lstStyle/>
           <a:p>
             <a:pPr>
-              <a:defRPr sz="2100" b="1">
+              <a:defRPr sz="2000" b="1">
                 <a:solidFill>
                   <a:srgbClr val="FFFFFF"/>
                 </a:solidFill>
@@ -4948,7 +4948,7 @@
           <a:lstStyle/>
           <a:p>
             <a:pPr>
-              <a:defRPr sz="1300" i="1">
+              <a:defRPr sz="1200" i="1">
                 <a:solidFill>
                   <a:srgbClr val="D4A373"/>
                 </a:solidFill>
@@ -5226,7 +5226,7 @@
               </a:defRPr>
             </a:pPr>
             <a:r>
-              <a:t>THERAPEUTIC TOOLS</a:t>
+              <a:t>EVIDENCE-BASED THERAPEUTIC TOOLS</a:t>
             </a:r>
           </a:p>
         </p:txBody>
@@ -5254,14 +5254,14 @@
           <a:lstStyle/>
           <a:p>
             <a:pPr>
-              <a:defRPr sz="2100" b="1">
+              <a:defRPr sz="2000" b="1">
                 <a:solidFill>
                   <a:srgbClr val="FFFFFF"/>
                 </a:solidFill>
               </a:defRPr>
             </a:pPr>
             <a:r>
-              <a:t>SLIDE 15: SOMATIC &amp; GROUNDING INTERVENTIONS</a:t>
+              <a:t>SLIDE 15: SOMATIC &amp; GROUNDING CBT INTERVENTIONS</a:t>
             </a:r>
           </a:p>
         </p:txBody>
@@ -5289,14 +5289,14 @@
           <a:lstStyle/>
           <a:p>
             <a:pPr>
-              <a:defRPr sz="1300" i="1">
+              <a:defRPr sz="1200" i="1">
                 <a:solidFill>
                   <a:srgbClr val="D4A373"/>
                 </a:solidFill>
               </a:defRPr>
             </a:pPr>
             <a:r>
-              <a:t>Evidence-Based Cognitive Behavioral Therapy Techniques</a:t>
+              <a:t>Integrated Cognitive Reframing, Somatic Breathing, &amp; Music Sanctuary</a:t>
             </a:r>
           </a:p>
         </p:txBody>
@@ -5567,7 +5567,7 @@
               </a:defRPr>
             </a:pPr>
             <a:r>
-              <a:t>TECHNICAL SPECIFICATIONS</a:t>
+              <a:t>TECHNICAL SPECIFICATIONS &amp; REQUIREMENTS</a:t>
             </a:r>
           </a:p>
         </p:txBody>
@@ -5595,14 +5595,14 @@
           <a:lstStyle/>
           <a:p>
             <a:pPr>
-              <a:defRPr sz="2100" b="1">
+              <a:defRPr sz="2000" b="1">
                 <a:solidFill>
                   <a:srgbClr val="FFFFFF"/>
                 </a:solidFill>
               </a:defRPr>
             </a:pPr>
             <a:r>
-              <a:t>SLIDE 16: SYSTEM REQUIREMENTS &amp; SPECIFICATIONS</a:t>
+              <a:t>SLIDE 16: SYSTEM REQUIREMENTS &amp; DEPLOYMENT PARAMETERS</a:t>
             </a:r>
           </a:p>
         </p:txBody>
@@ -5630,14 +5630,14 @@
           <a:lstStyle/>
           <a:p>
             <a:pPr>
-              <a:defRPr sz="1300" i="1">
+              <a:defRPr sz="1200" i="1">
                 <a:solidFill>
                   <a:srgbClr val="D4A373"/>
                 </a:solidFill>
               </a:defRPr>
             </a:pPr>
             <a:r>
-              <a:t>Hardware &amp; Software Deployment Parameters</a:t>
+              <a:t>Hardware &amp; Software Operating Environment</a:t>
             </a:r>
           </a:p>
         </p:txBody>
@@ -5908,7 +5908,7 @@
               </a:defRPr>
             </a:pPr>
             <a:r>
-              <a:t>FINANCIAL COMPLIANCE</a:t>
+              <a:t>FINANCIAL COMPLIANCE &amp; GRANT AUDIT</a:t>
             </a:r>
           </a:p>
         </p:txBody>
@@ -5936,7 +5936,7 @@
           <a:lstStyle/>
           <a:p>
             <a:pPr>
-              <a:defRPr sz="2100" b="1">
+              <a:defRPr sz="2000" b="1">
                 <a:solidFill>
                   <a:srgbClr val="FFFFFF"/>
                 </a:solidFill>
@@ -5971,7 +5971,7 @@
           <a:lstStyle/>
           <a:p>
             <a:pPr>
-              <a:defRPr sz="1300" i="1">
+              <a:defRPr sz="1200" i="1">
                 <a:solidFill>
                   <a:srgbClr val="D4A373"/>
                 </a:solidFill>
@@ -6267,7 +6267,7 @@
               </a:defRPr>
             </a:pPr>
             <a:r>
-              <a:t>FUTURE DEVELOPMENT</a:t>
+              <a:t>FUTURE DEVELOPMENT ROADMAP</a:t>
             </a:r>
           </a:p>
         </p:txBody>
@@ -6295,14 +6295,14 @@
           <a:lstStyle/>
           <a:p>
             <a:pPr>
-              <a:defRPr sz="2100" b="1">
+              <a:defRPr sz="2000" b="1">
                 <a:solidFill>
                   <a:srgbClr val="FFFFFF"/>
                 </a:solidFill>
               </a:defRPr>
             </a:pPr>
             <a:r>
-              <a:t>SLIDE 18: PROJECT ROADMAP &amp; FUTURE EXTENSIONS</a:t>
+              <a:t>SLIDE 18: PROJECT ROADMAP &amp; EXTENSION PHASES</a:t>
             </a:r>
           </a:p>
         </p:txBody>
@@ -6330,14 +6330,14 @@
           <a:lstStyle/>
           <a:p>
             <a:pPr>
-              <a:defRPr sz="1300" i="1">
+              <a:defRPr sz="1200" i="1">
                 <a:solidFill>
                   <a:srgbClr val="D4A373"/>
                 </a:solidFill>
               </a:defRPr>
             </a:pPr>
             <a:r>
-              <a:t>Multi-Phase Development &amp; Clinical Deployment Plan</a:t>
+              <a:t>Multi-Phase Roadmap for Clinical Deployment &amp; Expansion</a:t>
             </a:r>
           </a:p>
         </p:txBody>
@@ -6608,7 +6608,7 @@
               </a:defRPr>
             </a:pPr>
             <a:r>
-              <a:t>CONCLUSION</a:t>
+              <a:t>CONCLUSION &amp; SOCIETAL IMPACT</a:t>
             </a:r>
           </a:p>
         </p:txBody>
@@ -6636,7 +6636,7 @@
           <a:lstStyle/>
           <a:p>
             <a:pPr>
-              <a:defRPr sz="2100" b="1">
+              <a:defRPr sz="2000" b="1">
                 <a:solidFill>
                   <a:srgbClr val="FFFFFF"/>
                 </a:solidFill>
@@ -6671,14 +6671,14 @@
           <a:lstStyle/>
           <a:p>
             <a:pPr>
-              <a:defRPr sz="1300" i="1">
+              <a:defRPr sz="1200" i="1">
                 <a:solidFill>
                   <a:srgbClr val="D4A373"/>
                 </a:solidFill>
               </a:defRPr>
             </a:pPr>
             <a:r>
-              <a:t>Democratizing Accessible Mental Healthcare Across Tamil Nadu</a:t>
+              <a:t>Transforming Mental Healthcare Access Across Tamil Nadu and India</a:t>
             </a:r>
           </a:p>
         </p:txBody>
@@ -6949,7 +6949,7 @@
               </a:defRPr>
             </a:pPr>
             <a:r>
-              <a:t>ABSTRACT &amp; CORE VISION</a:t>
+              <a:t>EXECUTIVE SUMMARY &amp; ABSTRACT</a:t>
             </a:r>
           </a:p>
         </p:txBody>
@@ -6977,14 +6977,14 @@
           <a:lstStyle/>
           <a:p>
             <a:pPr>
-              <a:defRPr sz="2100" b="1">
+              <a:defRPr sz="2000" b="1">
                 <a:solidFill>
                   <a:srgbClr val="FFFFFF"/>
                 </a:solidFill>
               </a:defRPr>
             </a:pPr>
             <a:r>
-              <a:t>SLIDE 02: EXECUTIVE SUMMARY &amp; ABSTRACT</a:t>
+              <a:t>SLIDE 02: EXECUTIVE SUMMARY: REVOLUTIONIZING OUTPATIENT PSYCHIATRIC CARE</a:t>
             </a:r>
           </a:p>
         </p:txBody>
@@ -7012,14 +7012,14 @@
           <a:lstStyle/>
           <a:p>
             <a:pPr>
-              <a:defRPr sz="1300" i="1">
+              <a:defRPr sz="1200" i="1">
                 <a:solidFill>
                   <a:srgbClr val="D4A373"/>
                 </a:solidFill>
               </a:defRPr>
             </a:pPr>
             <a:r>
-              <a:t>Bridging the 167-Hour Unmonitored Clinical Care Gap</a:t>
+              <a:t>24/7 Empathetic Triage, Multimodal Sensing, and Explainable AI Decision Support</a:t>
             </a:r>
           </a:p>
         </p:txBody>
@@ -7105,7 +7105,7 @@
               </a:defRPr>
             </a:pPr>
             <a:r>
-              <a:t>•  The 167-Hour Problem: Outpatients receive 1 hour of weekly therapy, leaving 167 hours unmonitored during acute distress windows.</a:t>
+              <a:t>•  The 167-Hour Care Gap: Outpatients receive 1 hour of weekly therapy, leaving 167 hours unmonitored during critical distress windows.</a:t>
             </a:r>
           </a:p>
           <a:p>
@@ -7123,7 +7123,7 @@
               </a:defRPr>
             </a:pPr>
             <a:r>
-              <a:t>•  Triple-Tier Therapeutics: Integrates Rogerian Validation -&gt; Biological Psychoeducation (Cortisol/Amygdala) -&gt; Actionable CBT Skill.</a:t>
+              <a:t>•  Multimodal Sensor Fusion: Unites FINGERS HD Webcam 68-landmark facial reticle vision, ZEBRONICS mic voice prosody, and fine-tuned BERT NLP.</a:t>
             </a:r>
           </a:p>
           <a:p>
@@ -7141,7 +7141,7 @@
               </a:defRPr>
             </a:pPr>
             <a:r>
-              <a:t>•  Multimodal Sensor Fusion: Combines FINGERS HD Webcam 68-landmark facial affect, ZEBRONICS mic voice prosody, and fine-tuned BERT NLP.</a:t>
+              <a:t>•  Triple-Tier Therapeutics: Empathetic Validation -&gt; Biological Psychoeducation (Cortisol/Amygdala Science) -&gt; Actionable CBT Skill.</a:t>
             </a:r>
           </a:p>
           <a:p>
@@ -7159,7 +7159,7 @@
               </a:defRPr>
             </a:pPr>
             <a:r>
-              <a:t>•  Clinical Safety &amp; SOS Protocols: WHO Suicide Prevention &amp; Columbia C-SSRS triage protocol for instant automated doctor escalation.</a:t>
+              <a:t>•  Explainable AI (XAI): SHAP &amp; LIME token attribution heatmaps eliminate black-box risks, empowering clinicians to audit AI decisions.</a:t>
             </a:r>
           </a:p>
           <a:p>
@@ -7177,7 +7177,7 @@
               </a:defRPr>
             </a:pPr>
             <a:r>
-              <a:t>•  Production Deployment: Live FastAPI backend hosted on HuggingFace Space with Write-Ahead Logging (WAL) database and n8n webhooks.</a:t>
+              <a:t>•  Automated Crisis Escalation: Integrates Columbia C-SSRS triage and n8n webhooks for instant doctor notification and automated booking.</a:t>
             </a:r>
           </a:p>
         </p:txBody>
@@ -7308,7 +7308,7 @@
               </a:defRPr>
             </a:pPr>
             <a:r>
-              <a:t>ACKNOWLEDGEMENTS &amp; DEMO</a:t>
+              <a:t>ACKNOWLEDGEMENTS &amp; LIVE DEMO</a:t>
             </a:r>
           </a:p>
         </p:txBody>
@@ -7336,7 +7336,7 @@
           <a:lstStyle/>
           <a:p>
             <a:pPr>
-              <a:defRPr sz="2100" b="1">
+              <a:defRPr sz="2000" b="1">
                 <a:solidFill>
                   <a:srgbClr val="FFFFFF"/>
                 </a:solidFill>
@@ -7371,7 +7371,7 @@
           <a:lstStyle/>
           <a:p>
             <a:pPr>
-              <a:defRPr sz="1300" i="1">
+              <a:defRPr sz="1200" i="1">
                 <a:solidFill>
                   <a:srgbClr val="D4A373"/>
                 </a:solidFill>
@@ -7649,7 +7649,7 @@
               </a:defRPr>
             </a:pPr>
             <a:r>
-              <a:t>PROBLEM DEFINITION</a:t>
+              <a:t>PROBLEM DEFINITION &amp; EXISTING SYSTEM LIMITATIONS</a:t>
             </a:r>
           </a:p>
         </p:txBody>
@@ -7677,14 +7677,14 @@
           <a:lstStyle/>
           <a:p>
             <a:pPr>
-              <a:defRPr sz="2100" b="1">
+              <a:defRPr sz="2000" b="1">
                 <a:solidFill>
                   <a:srgbClr val="FFFFFF"/>
                 </a:solidFill>
               </a:defRPr>
             </a:pPr>
             <a:r>
-              <a:t>SLIDE 03: CLINICAL PROBLEM STATEMENT &amp; EXISTING SYSTEM LIMITATIONS</a:t>
+              <a:t>SLIDE 03: CLINICAL PROBLEM STATEMENT &amp; LIMITATIONS OF CURRENT SOLUTIONS</a:t>
             </a:r>
           </a:p>
         </p:txBody>
@@ -7712,14 +7712,14 @@
           <a:lstStyle/>
           <a:p>
             <a:pPr>
-              <a:defRPr sz="1300" i="1">
+              <a:defRPr sz="1200" i="1">
                 <a:solidFill>
                   <a:srgbClr val="D4A373"/>
                 </a:solidFill>
               </a:defRPr>
             </a:pPr>
             <a:r>
-              <a:t>Critical Vulnerability in Outpatient Psychiatric Healthcare</a:t>
+              <a:t>Analyzing Structural Weaknesses in Rule-Based Bots, LLM Wrappers, and Therapy Apps</a:t>
             </a:r>
           </a:p>
         </p:txBody>
@@ -7805,7 +7805,7 @@
               </a:defRPr>
             </a:pPr>
             <a:r>
-              <a:t>•  1. Rule-Based Chatbots (Woebot, Wysa): Keyword matching with pre-written static scripts. Zero clinical memory or doctor involvement.</a:t>
+              <a:t>•  1. Rule-Based Chatbots (Woebot, Wysa): Depend on static keyword matching and pre-written scripts. Zero clinical memory or doctor involvement.</a:t>
             </a:r>
           </a:p>
           <a:p>
@@ -7823,7 +7823,7 @@
               </a:defRPr>
             </a:pPr>
             <a:r>
-              <a:t>•  2. LLM Wrappers (ChatGPT Bots): Raw prompts sent to OpenAI without privacy filtering, high hallucination risk, zero PHQ/MHQ scoring.</a:t>
+              <a:t>•  2. LLM Wrappers (ChatGPT Bots): Transmit un-anonymized data to third-party servers with zero privacy filtering, high hallucination risk, and no PHQ/MHQ scoring.</a:t>
             </a:r>
           </a:p>
           <a:p>
@@ -7841,7 +7841,7 @@
               </a:defRPr>
             </a:pPr>
             <a:r>
-              <a:t>•  3. Traditional Therapy Apps (BetterHelp): Costly ($60-$100/hr), weeks of waiting, zero 24/7 real-time monitoring during acute crises.</a:t>
+              <a:t>•  3. Traditional Therapy Apps (BetterHelp): Costly ($60-$100/hr), involve long waiting lists, and lack 24/7 real-time monitoring between sessions.</a:t>
             </a:r>
           </a:p>
           <a:p>
@@ -7877,7 +7877,7 @@
               </a:defRPr>
             </a:pPr>
             <a:r>
-              <a:t>•  5. Patient Attrition &amp; Loss of Follow-up: High dropout rates due to lack of continuous engagement between weekly clinical visits.</a:t>
+              <a:t>•  5. High Attrition &amp; Dropout: Outpatients disengage due to lack of continuous bio-behavioral monitoring between weekly therapy visits.</a:t>
             </a:r>
           </a:p>
         </p:txBody>
@@ -8008,7 +8008,7 @@
               </a:defRPr>
             </a:pPr>
             <a:r>
-              <a:t>SCIENTIFIC EVIDENCE</a:t>
+              <a:t>RESEARCH &amp; SCIENTIFIC MEDICAL VALIDATION</a:t>
             </a:r>
           </a:p>
         </p:txBody>
@@ -8036,14 +8036,14 @@
           <a:lstStyle/>
           <a:p>
             <a:pPr>
-              <a:defRPr sz="2100" b="1">
+              <a:defRPr sz="2000" b="1">
                 <a:solidFill>
                   <a:srgbClr val="FFFFFF"/>
                 </a:solidFill>
               </a:defRPr>
             </a:pPr>
             <a:r>
-              <a:t>SLIDE 04: RESEARCH &amp; SCIENTIFIC MEDICAL VALIDATION</a:t>
+              <a:t>SLIDE 04: RESEARCH &amp; PEER-REVIEWED SCIENTIFIC EVIDENCE</a:t>
             </a:r>
           </a:p>
         </p:txBody>
@@ -8071,14 +8071,14 @@
           <a:lstStyle/>
           <a:p>
             <a:pPr>
-              <a:defRPr sz="1300" i="1">
+              <a:defRPr sz="1200" i="1">
                 <a:solidFill>
                   <a:srgbClr val="D4A373"/>
                 </a:solidFill>
               </a:defRPr>
             </a:pPr>
             <a:r>
-              <a:t>Peer-Reviewed Clinical Evidence Supporting Keffi AI</a:t>
+              <a:t>Medical Literature Validating Keffi's Therapeutic Framework &amp; Protocols</a:t>
             </a:r>
           </a:p>
         </p:txBody>
@@ -8182,7 +8182,7 @@
               </a:defRPr>
             </a:pPr>
             <a:r>
-              <a:t>•  Therapeutic Alliance (Norcross &amp; Wampold, 2011): Person-centered empathy accounts for 30% of treatment success independent of drugs.</a:t>
+              <a:t>•  Therapeutic Alliance (Norcross &amp; Wampold, 2011): Person-centered empathy accounts for 30% of treatment success independent of medication.</a:t>
             </a:r>
           </a:p>
           <a:p>
@@ -8200,7 +8200,7 @@
               </a:defRPr>
             </a:pPr>
             <a:r>
-              <a:t>•  ACT &amp; Mindfulness (Hayes et al., 2006): Grounding &amp; 4-7-8 somatic breathing reduce panic attacks by 45-50%.</a:t>
+              <a:t>•  ACT &amp; Mindfulness (Hayes et al., 2006): Grounding &amp; 4-7-8 somatic breathing reduce panic attacks by 45-50% through physiological regulation.</a:t>
             </a:r>
           </a:p>
           <a:p>
@@ -8236,7 +8236,7 @@
               </a:defRPr>
             </a:pPr>
             <a:r>
-              <a:t>•  Columbia C-SSRS Crisis Triage (Posner et al., 2011): Validated suicide triage protocol backing Keffi's automated emergency SOS.</a:t>
+              <a:t>•  Columbia C-SSRS Crisis Triage (Posner et al., 2011): Clinically validated suicide triage protocol powering Keffi's automated emergency SOS.</a:t>
             </a:r>
           </a:p>
         </p:txBody>
@@ -8367,7 +8367,7 @@
               </a:defRPr>
             </a:pPr>
             <a:r>
-              <a:t>LITERATURE COMPARISON</a:t>
+              <a:t>LITERATURE SURVEY &amp; SYSTEM COMPARISON</a:t>
             </a:r>
           </a:p>
         </p:txBody>
@@ -8395,14 +8395,14 @@
           <a:lstStyle/>
           <a:p>
             <a:pPr>
-              <a:defRPr sz="2100" b="1">
+              <a:defRPr sz="2000" b="1">
                 <a:solidFill>
                   <a:srgbClr val="FFFFFF"/>
                 </a:solidFill>
               </a:defRPr>
             </a:pPr>
             <a:r>
-              <a:t>SLIDE 05: LITERATURE SURVEY &amp; SYSTEM COMPARISON</a:t>
+              <a:t>SLIDE 05: LITERATURE SURVEY &amp; SYSTEM BENCHMARK MATRIX</a:t>
             </a:r>
           </a:p>
         </p:txBody>
@@ -8430,14 +8430,14 @@
           <a:lstStyle/>
           <a:p>
             <a:pPr>
-              <a:defRPr sz="1300" i="1">
+              <a:defRPr sz="1200" i="1">
                 <a:solidFill>
                   <a:srgbClr val="D4A373"/>
                 </a:solidFill>
               </a:defRPr>
             </a:pPr>
             <a:r>
-              <a:t>Comparative Matrix Against Existing Mental Health Technologies</a:t>
+              <a:t>Comparative Matrix Demonstrating Keffi's Technical &amp; Clinical Innovations</a:t>
             </a:r>
           </a:p>
         </p:txBody>
@@ -8523,7 +8523,7 @@
               </a:defRPr>
             </a:pPr>
             <a:r>
-              <a:t>•  Woebot (2017): Automated CBT chatbot | Limitation: Rigid decision tree scripts with zero voice/facial affect sensing.</a:t>
+              <a:t>•  Woebot (JMIR 2017): Automated CBT chatbot | Limitation: Rigid decision trees with zero voice prosody, facial tracking, or clinician XAI.</a:t>
             </a:r>
           </a:p>
           <a:p>
@@ -8541,7 +8541,7 @@
               </a:defRPr>
             </a:pPr>
             <a:r>
-              <a:t>•  Wysa (2020): Conversational agent with guided meditation | Limitation: No automated psychiatrist booking or XAI heatmaps.</a:t>
+              <a:t>•  Wysa (2020): Conversational agent with guided meditation | Limitation: Rule-bound scripts with no automated doctor appointment booking.</a:t>
             </a:r>
           </a:p>
           <a:p>
@@ -8559,7 +8559,7 @@
               </a:defRPr>
             </a:pPr>
             <a:r>
-              <a:t>•  Youper (2021): Mind-monitoring AI app | Limitation: Proprietary black-box LLM without transparent SHAP/LIME attribution.</a:t>
+              <a:t>•  Youper (2021): Mind-monitoring AI app | Limitation: Proprietary black-box LLM without transparent SHAP/LIME attribution heatmaps.</a:t>
             </a:r>
           </a:p>
           <a:p>
@@ -8708,7 +8708,7 @@
               </a:defRPr>
             </a:pPr>
             <a:r>
-              <a:t>NLP EMOTION TAXONOMY</a:t>
+              <a:t>NLP EMOTION TAXONOMY &amp; CLASSIFICATION</a:t>
             </a:r>
           </a:p>
         </p:txBody>
@@ -8736,7 +8736,7 @@
           <a:lstStyle/>
           <a:p>
             <a:pPr>
-              <a:defRPr sz="2100" b="1">
+              <a:defRPr sz="2000" b="1">
                 <a:solidFill>
                   <a:srgbClr val="FFFFFF"/>
                 </a:solidFill>
@@ -8771,14 +8771,14 @@
           <a:lstStyle/>
           <a:p>
             <a:pPr>
-              <a:defRPr sz="1300" i="1">
+              <a:defRPr sz="1200" i="1">
                 <a:solidFill>
                   <a:srgbClr val="D4A373"/>
                 </a:solidFill>
               </a:defRPr>
             </a:pPr>
             <a:r>
-              <a:t>Fine-Tuned Transformer Affective State Taxonomy</a:t>
+              <a:t>Fine-Tuned Transformer Model Classifying 96 Granular Affective States</a:t>
             </a:r>
           </a:p>
         </p:txBody>
@@ -8864,7 +8864,7 @@
               </a:defRPr>
             </a:pPr>
             <a:r>
-              <a:t>•  41 Depression Types: MDD, Chronic PDD, Bipolar Swings, Postpartum, SAD, Smiling Depression, TRD, Melancholic, Agitated.</a:t>
+              <a:t>•  41 Depression Types: MDD, Chronic PDD, Bipolar Swings, Postpartum, SAD, Smiling Depression, TRD, Melancholic, Agitated, Psychotic.</a:t>
             </a:r>
           </a:p>
           <a:p>
@@ -8882,7 +8882,7 @@
               </a:defRPr>
             </a:pPr>
             <a:r>
-              <a:t>•  18 Alleviation &amp; Recovery States: Full Remission, Sustained Recovery, Partial Response, Placebo Effect, Somatic Stability.</a:t>
+              <a:t>•  18 Alleviation &amp; Recovery States: Full Remission, Sustained Recovery, Partial Response, Placebo Effect, Somatic Stability, Re-engagement.</a:t>
             </a:r>
           </a:p>
           <a:p>
@@ -8900,7 +8900,7 @@
               </a:defRPr>
             </a:pPr>
             <a:r>
-              <a:t>•  20 Attrition Types &amp; 17 Loss of Follow-up Categories: Tracking voluntary dropout, stigma, non-compliance, and admin loss.</a:t>
+              <a:t>•  20 Attrition Types &amp; 17 Loss of Follow-up Categories: Tracking voluntary dropout, stigma, non-compliance, and administrative loss.</a:t>
             </a:r>
           </a:p>
           <a:p>
@@ -8918,7 +8918,7 @@
               </a:defRPr>
             </a:pPr>
             <a:r>
-              <a:t>•  High Classification Accuracy: Evaluated with 94.8% F1-score accuracy against benchmark clinical transcripts.</a:t>
+              <a:t>•  High Classification Efficacy: Fine-tuned BERT architecture achieving 94.8% F1-score accuracy against benchmark clinical transcripts.</a:t>
             </a:r>
           </a:p>
         </p:txBody>
@@ -9049,7 +9049,7 @@
               </a:defRPr>
             </a:pPr>
             <a:r>
-              <a:t>CLINICAL METRICS</a:t>
+              <a:t>CLINICAL METRICS &amp; RISK STRATIFICATION</a:t>
             </a:r>
           </a:p>
         </p:txBody>
@@ -9077,7 +9077,7 @@
           <a:lstStyle/>
           <a:p>
             <a:pPr>
-              <a:defRPr sz="2100" b="1">
+              <a:defRPr sz="2000" b="1">
                 <a:solidFill>
                   <a:srgbClr val="FFFFFF"/>
                 </a:solidFill>
@@ -9112,14 +9112,14 @@
           <a:lstStyle/>
           <a:p>
             <a:pPr>
-              <a:defRPr sz="1300" i="1">
+              <a:defRPr sz="1200" i="1">
                 <a:solidFill>
                   <a:srgbClr val="D4A373"/>
                 </a:solidFill>
               </a:defRPr>
             </a:pPr>
             <a:r>
-              <a:t>Quantitative Longitudinal Mental Health Assessment</a:t>
+              <a:t>Quantitative Mental Health Quotient &amp; Longitudinal Tracking</a:t>
             </a:r>
           </a:p>
         </p:txBody>
@@ -9205,7 +9205,7 @@
               </a:defRPr>
             </a:pPr>
             <a:r>
-              <a:t>•  Mental Health Quotient (MHQ): Dynamic 0-100 wellness score updated continuously based on patient interactions.</a:t>
+              <a:t>•  Mental Health Quotient (MHQ): Dynamic 0-100 wellness score updated continuously based on patient interaction telemetry.</a:t>
             </a:r>
           </a:p>
           <a:p>
@@ -9259,7 +9259,7 @@
               </a:defRPr>
             </a:pPr>
             <a:r>
-              <a:t>•  Longitudinal Risk Tracking: Tracks score deltas across time to alert clinical supervisors to sudden emotional drops.</a:t>
+              <a:t>•  Longitudinal Delta Tracking: Monitors score changes over time to alert attending clinical supervisors to sudden emotional drops.</a:t>
             </a:r>
           </a:p>
         </p:txBody>
@@ -9390,7 +9390,7 @@
               </a:defRPr>
             </a:pPr>
             <a:r>
-              <a:t>HARDWARE &amp; COMPUTER VISION</a:t>
+              <a:t>HARDWARE &amp; COMPUTER VISION INTEGRATION</a:t>
             </a:r>
           </a:p>
         </p:txBody>
@@ -9418,7 +9418,7 @@
           <a:lstStyle/>
           <a:p>
             <a:pPr>
-              <a:defRPr sz="2100" b="1">
+              <a:defRPr sz="2000" b="1">
                 <a:solidFill>
                   <a:srgbClr val="FFFFFF"/>
                 </a:solidFill>
@@ -9453,7 +9453,7 @@
           <a:lstStyle/>
           <a:p>
             <a:pPr>
-              <a:defRPr sz="1300" i="1">
+              <a:defRPr sz="1200" i="1">
                 <a:solidFill>
                   <a:srgbClr val="D4A373"/>
                 </a:solidFill>
@@ -9600,7 +9600,7 @@
               </a:defRPr>
             </a:pPr>
             <a:r>
-              <a:t>•  Visual Biofeedback: Renders real-time HUD badge displaying facial affect confidence % and physiological tension metrics.</a:t>
+              <a:t>•  Visual Biofeedback HUD: Renders real-time HUD badge displaying facial affect confidence % and physiological tension metrics.</a:t>
             </a:r>
           </a:p>
         </p:txBody>
@@ -9731,7 +9731,7 @@
               </a:defRPr>
             </a:pPr>
             <a:r>
-              <a:t>USER EXPERIENCE</a:t>
+              <a:t>USER EXPERIENCE &amp; REAL-TIME INTERACTION</a:t>
             </a:r>
           </a:p>
         </p:txBody>
@@ -9759,7 +9759,7 @@
           <a:lstStyle/>
           <a:p>
             <a:pPr>
-              <a:defRPr sz="2100" b="1">
+              <a:defRPr sz="2000" b="1">
                 <a:solidFill>
                   <a:srgbClr val="FFFFFF"/>
                 </a:solidFill>
@@ -9794,14 +9794,14 @@
           <a:lstStyle/>
           <a:p>
             <a:pPr>
-              <a:defRPr sz="1300" i="1">
+              <a:defRPr sz="1200" i="1">
                 <a:solidFill>
                   <a:srgbClr val="D4A373"/>
                 </a:solidFill>
               </a:defRPr>
             </a:pPr>
             <a:r>
-              <a:t>Real-Time Interactivity &amp; Continuous Conversational Loop</a:t>
+              <a:t>Real-Time Widescreen Video Call Modal &amp; Continuous Speech Loop</a:t>
             </a:r>
           </a:p>
         </p:txBody>
